--- a/evaluation/dashboard/public/decks/uxl-onedal-maintainer-briefing.pptx
+++ b/evaluation/dashboard/public/decks/uxl-onedal-maintainer-briefing.pptx
@@ -2,20 +2,19 @@
 <file path=ppt/presentation.xml><?xml version="1.0" encoding="utf-8"?>
 <p:presentation xmlns:p="http://schemas.openxmlformats.org/presentationml/2006/main">
   <p:sldMasterIdLst>
-    <p:sldMasterId xmlns:r="http://schemas.openxmlformats.org/officeDocument/2006/relationships" id="2147483648" r:id="R0b814743be794766"/>
-    <p:sldMasterId xmlns:r="http://schemas.openxmlformats.org/officeDocument/2006/relationships" id="2147483665" r:id="Rfe18bbb04bb44e08"/>
+    <p:sldMasterId xmlns:r="http://schemas.openxmlformats.org/officeDocument/2006/relationships" id="2147483648" r:id="Ra9f967640b444692"/>
+    <p:sldMasterId xmlns:r="http://schemas.openxmlformats.org/officeDocument/2006/relationships" id="2147483665" r:id="R52e5a567c62b4d93"/>
   </p:sldMasterIdLst>
   <p:notesMasterIdLst>
-    <p:notesMasterId xmlns:r="http://schemas.openxmlformats.org/officeDocument/2006/relationships" r:id="R8347d548e7b4476e"/>
+    <p:notesMasterId xmlns:r="http://schemas.openxmlformats.org/officeDocument/2006/relationships" r:id="Rc62cbbea905d4cff"/>
   </p:notesMasterIdLst>
   <p:sldIdLst>
-    <p:sldId xmlns:r="http://schemas.openxmlformats.org/officeDocument/2006/relationships" id="256" r:id="Rd01dd6ecd4bf4000"/>
-    <p:sldId xmlns:r="http://schemas.openxmlformats.org/officeDocument/2006/relationships" id="257" r:id="R855671e2a1314c31"/>
-    <p:sldId xmlns:r="http://schemas.openxmlformats.org/officeDocument/2006/relationships" id="258" r:id="Rf54812b0cf6f461a"/>
-    <p:sldId xmlns:r="http://schemas.openxmlformats.org/officeDocument/2006/relationships" id="259" r:id="R7f9d912bf532410e"/>
-    <p:sldId xmlns:r="http://schemas.openxmlformats.org/officeDocument/2006/relationships" id="260" r:id="Rec7dae14e9324dc6"/>
-    <p:sldId xmlns:r="http://schemas.openxmlformats.org/officeDocument/2006/relationships" id="261" r:id="Rd1bf2bb43e9e471a"/>
-    <p:sldId xmlns:r="http://schemas.openxmlformats.org/officeDocument/2006/relationships" id="262" r:id="R063fe84fdcc5429d"/>
+    <p:sldId xmlns:r="http://schemas.openxmlformats.org/officeDocument/2006/relationships" id="256" r:id="R845fc07e96004f74"/>
+    <p:sldId xmlns:r="http://schemas.openxmlformats.org/officeDocument/2006/relationships" id="257" r:id="Rf8073d41f28e4b96"/>
+    <p:sldId xmlns:r="http://schemas.openxmlformats.org/officeDocument/2006/relationships" id="258" r:id="Rd0797e6b5404478e"/>
+    <p:sldId xmlns:r="http://schemas.openxmlformats.org/officeDocument/2006/relationships" id="259" r:id="Ra497fc9d7d4a41ee"/>
+    <p:sldId xmlns:r="http://schemas.openxmlformats.org/officeDocument/2006/relationships" id="260" r:id="R28ee48a086414e0c"/>
+    <p:sldId xmlns:r="http://schemas.openxmlformats.org/officeDocument/2006/relationships" id="261" r:id="R7350bb3e27de49c3"/>
   </p:sldIdLst>
   <p:sldSz cx="12192000" cy="6858000"/>
   <p:notesSz cx="6858000" cy="9144000"/>
@@ -619,7 +618,7 @@
           </a:p>
           <a:p xmlns:a="http://schemas.openxmlformats.org/drawingml/2006/main">
             <a:r>
-              <a:t>Speaker cue: Why this is useful to oneDAL at first glance</a:t>
+              <a:t>Speaker cue: What the skill tells an agent today</a:t>
             </a:r>
           </a:p>
         </p:txBody>
@@ -724,7 +723,7 @@
           </a:p>
           <a:p xmlns:a="http://schemas.openxmlformats.org/drawingml/2006/main">
             <a:r>
-              <a:t>Speaker cue: What the skill tells an agent today</a:t>
+              <a:t>Speaker cue: Evaluation inventory: 5 implemented, 1 honest gap</a:t>
             </a:r>
           </a:p>
         </p:txBody>
@@ -829,7 +828,7 @@
           </a:p>
           <a:p xmlns:a="http://schemas.openxmlformats.org/drawingml/2006/main">
             <a:r>
-              <a:t>Speaker cue: Evaluation inventory: 5 implemented, 1 honest gap</a:t>
+              <a:t>Speaker cue: How we chose the content</a:t>
             </a:r>
           </a:p>
         </p:txBody>
@@ -934,7 +933,7 @@
           </a:p>
           <a:p xmlns:a="http://schemas.openxmlformats.org/drawingml/2006/main">
             <a:r>
-              <a:t>Speaker cue: How we chose the content</a:t>
+              <a:t>Speaker cue: What project ownership would look like</a:t>
             </a:r>
           </a:p>
         </p:txBody>
@@ -965,111 +964,6 @@
 </file>
 
 <file path=ppt/notesSlides/notesSlide6.xml><?xml version="1.0" encoding="utf-8"?>
-<p:notes xmlns:p="http://schemas.openxmlformats.org/presentationml/2006/main">
-  <p:cSld>
-    <p:spTree>
-      <p:nvGrpSpPr>
-        <p:cNvPr id="1" name=""/>
-        <p:cNvGrpSpPr/>
-        <p:nvPr/>
-      </p:nvGrpSpPr>
-      <p:grpSpPr>
-        <a:xfrm xmlns:a="http://schemas.openxmlformats.org/drawingml/2006/main"/>
-      </p:grpSpPr>
-      <p:sp>
-        <p:nvSpPr>
-          <p:cNvPr id="2" name="Slide Image Placeholder 1"/>
-          <p:cNvSpPr>
-            <a:spLocks xmlns:a="http://schemas.openxmlformats.org/drawingml/2006/main" noGrp="1"/>
-          </p:cNvSpPr>
-          <p:nvPr>
-            <p:ph type="sldImg" idx="0"/>
-          </p:nvPr>
-        </p:nvSpPr>
-        <p:spPr/>
-      </p:sp>
-      <p:sp>
-        <p:nvSpPr>
-          <p:cNvPr id="3" name="Notes Placeholder 2"/>
-          <p:cNvSpPr>
-            <a:spLocks xmlns:a="http://schemas.openxmlformats.org/drawingml/2006/main" noGrp="1"/>
-          </p:cNvSpPr>
-          <p:nvPr>
-            <p:ph type="body" idx="1"/>
-          </p:nvPr>
-        </p:nvSpPr>
-        <p:spPr/>
-        <p:txBody>
-          <a:bodyPr xmlns:a="http://schemas.openxmlformats.org/drawingml/2006/main"/>
-          <a:lstStyle xmlns:a="http://schemas.openxmlformats.org/drawingml/2006/main"/>
-          <a:p xmlns:a="http://schemas.openxmlformats.org/drawingml/2006/main">
-            <a:r>
-              <a:t>[Sources]</a:t>
-            </a:r>
-          </a:p>
-          <a:p xmlns:a="http://schemas.openxmlformats.org/drawingml/2006/main">
-            <a:r>
-              <a:t>- https://github.com/uxlfoundation/skills/tree/main/skills/uxl-onedal</a:t>
-            </a:r>
-          </a:p>
-          <a:p xmlns:a="http://schemas.openxmlformats.org/drawingml/2006/main">
-            <a:r>
-              <a:t>- https://github.com/uxlfoundation/skills/blob/main/skill-cards/uxl-onedal.md</a:t>
-            </a:r>
-          </a:p>
-          <a:p xmlns:a="http://schemas.openxmlformats.org/drawingml/2006/main">
-            <a:r>
-              <a:t>- https://github.com/uxlfoundation/skills/blob/main/docs/maintainer-review/uxl-onedal.md</a:t>
-            </a:r>
-          </a:p>
-          <a:p xmlns:a="http://schemas.openxmlformats.org/drawingml/2006/main">
-            <a:r>
-              <a:t>- https://github.com/uxlfoundation/skills/blob/main/evaluation/harbor/suites.json</a:t>
-            </a:r>
-          </a:p>
-          <a:p xmlns:a="http://schemas.openxmlformats.org/drawingml/2006/main">
-            <a:r>
-              <a:t>[/Sources]</a:t>
-            </a:r>
-          </a:p>
-          <a:p xmlns:a="http://schemas.openxmlformats.org/drawingml/2006/main">
-            <a:r>
-              <a:t/>
-            </a:r>
-          </a:p>
-          <a:p xmlns:a="http://schemas.openxmlformats.org/drawingml/2006/main">
-            <a:r>
-              <a:t>Speaker cue: What project ownership would look like</a:t>
-            </a:r>
-          </a:p>
-        </p:txBody>
-      </p:sp>
-      <p:sp>
-        <p:nvSpPr>
-          <p:cNvPr id="4" name="Slide Number Placeholder 3"/>
-          <p:cNvSpPr>
-            <a:spLocks xmlns:a="http://schemas.openxmlformats.org/drawingml/2006/main" noGrp="1"/>
-          </p:cNvSpPr>
-          <p:nvPr>
-            <p:ph type="sldNum" idx="5"/>
-          </p:nvPr>
-        </p:nvSpPr>
-        <p:spPr/>
-        <p:txBody>
-          <a:bodyPr xmlns:a="http://schemas.openxmlformats.org/drawingml/2006/main"/>
-          <a:lstStyle xmlns:a="http://schemas.openxmlformats.org/drawingml/2006/main"/>
-          <a:p xmlns:a="http://schemas.openxmlformats.org/drawingml/2006/main"/>
-        </p:txBody>
-      </p:sp>
-    </p:spTree>
-  </p:cSld>
-  <p:clrMapOvr>
-    <a:masterClrMapping xmlns:a="http://schemas.openxmlformats.org/drawingml/2006/main"/>
-  </p:clrMapOvr>
-</p:notes>
-</file>
-
-<file path=ppt/notesSlides/notesSlide7.xml><?xml version="1.0" encoding="utf-8"?>
 <p:notes xmlns:p="http://schemas.openxmlformats.org/presentationml/2006/main">
   <p:cSld>
     <p:spTree>
@@ -1180,7 +1074,7 @@
     <p:bg>
       <p:bgPr>
         <a:blipFill xmlns:a="http://schemas.openxmlformats.org/drawingml/2006/main">
-          <a:blip xmlns:r="http://schemas.openxmlformats.org/officeDocument/2006/relationships" r:embed="R4100e50d8b914b18">
+          <a:blip xmlns:r="http://schemas.openxmlformats.org/officeDocument/2006/relationships" r:embed="R8f7f4918f97b4836">
             <a:alphaModFix/>
           </a:blip>
           <a:stretch>
@@ -1615,7 +1509,7 @@
           <p:nvPr/>
         </p:nvPicPr>
         <p:blipFill rotWithShape="1">
-          <a:blip xmlns:r="http://schemas.openxmlformats.org/officeDocument/2006/relationships" xmlns:a="http://schemas.openxmlformats.org/drawingml/2006/main" r:embed="R1bc1b83624e64c63">
+          <a:blip xmlns:r="http://schemas.openxmlformats.org/officeDocument/2006/relationships" xmlns:a="http://schemas.openxmlformats.org/drawingml/2006/main" r:embed="R3d85f13741e640f9">
             <a:alphaModFix/>
           </a:blip>
           <a:srcRect xmlns:a="http://schemas.openxmlformats.org/drawingml/2006/main" l="0" t="0" r="0" b="0"/>
@@ -1645,7 +1539,7 @@
     <p:bg>
       <p:bgPr>
         <a:blipFill xmlns:a="http://schemas.openxmlformats.org/drawingml/2006/main">
-          <a:blip xmlns:r="http://schemas.openxmlformats.org/officeDocument/2006/relationships" r:embed="R76b0a2113d5b4084">
+          <a:blip xmlns:r="http://schemas.openxmlformats.org/officeDocument/2006/relationships" r:embed="R3e7492c5a12c42e0">
             <a:alphaModFix/>
           </a:blip>
           <a:stretch>
@@ -2679,7 +2573,7 @@
           <p:nvPr/>
         </p:nvPicPr>
         <p:blipFill rotWithShape="1">
-          <a:blip xmlns:r="http://schemas.openxmlformats.org/officeDocument/2006/relationships" xmlns:a="http://schemas.openxmlformats.org/drawingml/2006/main" r:embed="R171647c945f94137">
+          <a:blip xmlns:r="http://schemas.openxmlformats.org/officeDocument/2006/relationships" xmlns:a="http://schemas.openxmlformats.org/drawingml/2006/main" r:embed="Ra51d071545cd497f">
             <a:alphaModFix/>
           </a:blip>
           <a:srcRect xmlns:a="http://schemas.openxmlformats.org/drawingml/2006/main" l="0" t="0" r="0" b="0"/>
@@ -3703,7 +3597,7 @@
           <p:nvPr/>
         </p:nvPicPr>
         <p:blipFill rotWithShape="1">
-          <a:blip xmlns:r="http://schemas.openxmlformats.org/officeDocument/2006/relationships" xmlns:a="http://schemas.openxmlformats.org/drawingml/2006/main" r:embed="R09ad224a080049aa">
+          <a:blip xmlns:r="http://schemas.openxmlformats.org/officeDocument/2006/relationships" xmlns:a="http://schemas.openxmlformats.org/drawingml/2006/main" r:embed="Re546f0e919ca43fc">
             <a:alphaModFix/>
           </a:blip>
           <a:srcRect xmlns:a="http://schemas.openxmlformats.org/drawingml/2006/main" l="0" t="0" r="0" b="0"/>
@@ -3733,7 +3627,7 @@
     <p:bg>
       <p:bgPr>
         <a:blipFill xmlns:a="http://schemas.openxmlformats.org/drawingml/2006/main">
-          <a:blip xmlns:r="http://schemas.openxmlformats.org/officeDocument/2006/relationships" r:embed="R5e42b69d66fc49a1">
+          <a:blip xmlns:r="http://schemas.openxmlformats.org/officeDocument/2006/relationships" r:embed="Re65fd5a61ab44eb1">
             <a:alphaModFix/>
           </a:blip>
           <a:stretch>
@@ -5007,7 +4901,7 @@
           <p:nvPr/>
         </p:nvPicPr>
         <p:blipFill rotWithShape="1">
-          <a:blip xmlns:r="http://schemas.openxmlformats.org/officeDocument/2006/relationships" xmlns:a="http://schemas.openxmlformats.org/drawingml/2006/main" r:embed="R18efe77f192c4713">
+          <a:blip xmlns:r="http://schemas.openxmlformats.org/officeDocument/2006/relationships" xmlns:a="http://schemas.openxmlformats.org/drawingml/2006/main" r:embed="R62a47dc98b854815">
             <a:alphaModFix/>
           </a:blip>
           <a:srcRect xmlns:a="http://schemas.openxmlformats.org/drawingml/2006/main" l="0" t="0" r="0" b="0"/>
@@ -8251,7 +8145,7 @@
           <p:nvPr/>
         </p:nvPicPr>
         <p:blipFill rotWithShape="1">
-          <a:blip xmlns:r="http://schemas.openxmlformats.org/officeDocument/2006/relationships" xmlns:a="http://schemas.openxmlformats.org/drawingml/2006/main" r:embed="Ra58560d719554079">
+          <a:blip xmlns:r="http://schemas.openxmlformats.org/officeDocument/2006/relationships" xmlns:a="http://schemas.openxmlformats.org/drawingml/2006/main" r:embed="Rfdb3bc6b584b491b">
             <a:alphaModFix/>
           </a:blip>
           <a:srcRect xmlns:a="http://schemas.openxmlformats.org/drawingml/2006/main" l="0" t="0" r="0" b="0"/>
@@ -9989,7 +9883,7 @@
           <p:nvPr/>
         </p:nvPicPr>
         <p:blipFill rotWithShape="1">
-          <a:blip xmlns:r="http://schemas.openxmlformats.org/officeDocument/2006/relationships" xmlns:a="http://schemas.openxmlformats.org/drawingml/2006/main" r:embed="R6e745a9bca5e413a">
+          <a:blip xmlns:r="http://schemas.openxmlformats.org/officeDocument/2006/relationships" xmlns:a="http://schemas.openxmlformats.org/drawingml/2006/main" r:embed="Rfadc219e3d554606">
             <a:alphaModFix/>
           </a:blip>
           <a:srcRect xmlns:a="http://schemas.openxmlformats.org/drawingml/2006/main" l="0" t="0" r="0" b="0"/>
@@ -16818,7 +16712,7 @@
     <p:bg>
       <p:bgPr>
         <a:blipFill xmlns:a="http://schemas.openxmlformats.org/drawingml/2006/main">
-          <a:blip xmlns:r="http://schemas.openxmlformats.org/officeDocument/2006/relationships" r:embed="R4545f34dd3854f3e">
+          <a:blip xmlns:r="http://schemas.openxmlformats.org/officeDocument/2006/relationships" r:embed="Rcb05a69f18b74444">
             <a:alphaModFix/>
           </a:blip>
           <a:stretch>
@@ -17253,7 +17147,7 @@
           <p:nvPr/>
         </p:nvPicPr>
         <p:blipFill rotWithShape="1">
-          <a:blip xmlns:r="http://schemas.openxmlformats.org/officeDocument/2006/relationships" xmlns:a="http://schemas.openxmlformats.org/drawingml/2006/main" r:embed="R413fc14f10b84454">
+          <a:blip xmlns:r="http://schemas.openxmlformats.org/officeDocument/2006/relationships" xmlns:a="http://schemas.openxmlformats.org/drawingml/2006/main" r:embed="Re035abc6730f4e8f">
             <a:alphaModFix/>
           </a:blip>
           <a:srcRect xmlns:a="http://schemas.openxmlformats.org/drawingml/2006/main" l="0" t="0" r="0" b="0"/>
@@ -17283,7 +17177,7 @@
     <p:bg>
       <p:bgPr>
         <a:blipFill xmlns:a="http://schemas.openxmlformats.org/drawingml/2006/main">
-          <a:blip xmlns:r="http://schemas.openxmlformats.org/officeDocument/2006/relationships" r:embed="R7ec63bc302334904">
+          <a:blip xmlns:r="http://schemas.openxmlformats.org/officeDocument/2006/relationships" r:embed="R6d1991fc51d94546">
             <a:alphaModFix/>
           </a:blip>
           <a:stretch>
@@ -17916,7 +17810,7 @@
           <p:nvPr/>
         </p:nvPicPr>
         <p:blipFill rotWithShape="1">
-          <a:blip xmlns:r="http://schemas.openxmlformats.org/officeDocument/2006/relationships" xmlns:a="http://schemas.openxmlformats.org/drawingml/2006/main" r:embed="Rd5898abb3f464487">
+          <a:blip xmlns:r="http://schemas.openxmlformats.org/officeDocument/2006/relationships" xmlns:a="http://schemas.openxmlformats.org/drawingml/2006/main" r:embed="R3785cbfcc250415e">
             <a:alphaModFix/>
           </a:blip>
           <a:srcRect xmlns:a="http://schemas.openxmlformats.org/drawingml/2006/main" l="0" t="0" r="0" b="0"/>
@@ -18376,7 +18270,7 @@
     <p:bg>
       <p:bgPr>
         <a:blipFill xmlns:a="http://schemas.openxmlformats.org/drawingml/2006/main">
-          <a:blip xmlns:r="http://schemas.openxmlformats.org/officeDocument/2006/relationships" r:embed="R0c3d873c9cf545c8">
+          <a:blip xmlns:r="http://schemas.openxmlformats.org/officeDocument/2006/relationships" r:embed="R576b1bf30dc349ff">
             <a:alphaModFix/>
           </a:blip>
           <a:stretch>
@@ -19009,7 +18903,7 @@
           <p:nvPr/>
         </p:nvPicPr>
         <p:blipFill rotWithShape="1">
-          <a:blip xmlns:r="http://schemas.openxmlformats.org/officeDocument/2006/relationships" xmlns:a="http://schemas.openxmlformats.org/drawingml/2006/main" r:embed="Rf800cbdd543f4fd8">
+          <a:blip xmlns:r="http://schemas.openxmlformats.org/officeDocument/2006/relationships" xmlns:a="http://schemas.openxmlformats.org/drawingml/2006/main" r:embed="R113f42f85d4c4acf">
             <a:alphaModFix/>
           </a:blip>
           <a:srcRect xmlns:a="http://schemas.openxmlformats.org/drawingml/2006/main" l="0" t="0" r="0" b="0"/>
@@ -21665,7 +21559,7 @@
           <p:nvPr/>
         </p:nvPicPr>
         <p:blipFill rotWithShape="1">
-          <a:blip xmlns:r="http://schemas.openxmlformats.org/officeDocument/2006/relationships" xmlns:a="http://schemas.openxmlformats.org/drawingml/2006/main" r:embed="Radaf1fe064c145df">
+          <a:blip xmlns:r="http://schemas.openxmlformats.org/officeDocument/2006/relationships" xmlns:a="http://schemas.openxmlformats.org/drawingml/2006/main" r:embed="Rc60ad93884bd41af">
             <a:alphaModFix/>
           </a:blip>
           <a:srcRect xmlns:a="http://schemas.openxmlformats.org/drawingml/2006/main" l="0" t="0" r="0" b="0"/>
@@ -21695,7 +21589,7 @@
     <p:bg>
       <p:bgPr>
         <a:blipFill xmlns:a="http://schemas.openxmlformats.org/drawingml/2006/main">
-          <a:blip xmlns:r="http://schemas.openxmlformats.org/officeDocument/2006/relationships" r:embed="R017dd90ea93545fd">
+          <a:blip xmlns:r="http://schemas.openxmlformats.org/officeDocument/2006/relationships" r:embed="Rac2dfefb5d9c4ce4">
             <a:alphaModFix/>
           </a:blip>
           <a:stretch>
@@ -22539,7 +22433,7 @@
           <p:nvPr/>
         </p:nvPicPr>
         <p:blipFill rotWithShape="1">
-          <a:blip xmlns:r="http://schemas.openxmlformats.org/officeDocument/2006/relationships" xmlns:a="http://schemas.openxmlformats.org/drawingml/2006/main" r:embed="R60efd028a3f54358">
+          <a:blip xmlns:r="http://schemas.openxmlformats.org/officeDocument/2006/relationships" xmlns:a="http://schemas.openxmlformats.org/drawingml/2006/main" r:embed="R4f83a2fdba834d16">
             <a:alphaModFix/>
           </a:blip>
           <a:srcRect xmlns:a="http://schemas.openxmlformats.org/drawingml/2006/main" l="0" t="0" r="0" b="0"/>
@@ -22569,7 +22463,7 @@
     <p:bg>
       <p:bgPr>
         <a:blipFill xmlns:a="http://schemas.openxmlformats.org/drawingml/2006/main">
-          <a:blip xmlns:r="http://schemas.openxmlformats.org/officeDocument/2006/relationships" r:embed="Rd97b5124e0bc4168">
+          <a:blip xmlns:r="http://schemas.openxmlformats.org/officeDocument/2006/relationships" r:embed="R3771d7d60a254364">
             <a:alphaModFix/>
           </a:blip>
           <a:stretch>
@@ -23517,7 +23411,7 @@
           <p:nvPr/>
         </p:nvPicPr>
         <p:blipFill rotWithShape="1">
-          <a:blip xmlns:r="http://schemas.openxmlformats.org/officeDocument/2006/relationships" xmlns:a="http://schemas.openxmlformats.org/drawingml/2006/main" r:embed="Rbb4f72ca54354d6f">
+          <a:blip xmlns:r="http://schemas.openxmlformats.org/officeDocument/2006/relationships" xmlns:a="http://schemas.openxmlformats.org/drawingml/2006/main" r:embed="R1d0a9f02c95d4c6c">
             <a:alphaModFix/>
           </a:blip>
           <a:srcRect xmlns:a="http://schemas.openxmlformats.org/drawingml/2006/main" l="0" t="0" r="0" b="0"/>
@@ -23547,7 +23441,7 @@
     <p:bg>
       <p:bgPr>
         <a:blipFill xmlns:a="http://schemas.openxmlformats.org/drawingml/2006/main">
-          <a:blip xmlns:r="http://schemas.openxmlformats.org/officeDocument/2006/relationships" r:embed="R3f17775bcfb54753">
+          <a:blip xmlns:r="http://schemas.openxmlformats.org/officeDocument/2006/relationships" r:embed="Re835d9bf5a204225">
             <a:alphaModFix/>
           </a:blip>
           <a:stretch>
@@ -24008,7 +23902,7 @@
           <p:nvPr/>
         </p:nvPicPr>
         <p:blipFill rotWithShape="1">
-          <a:blip xmlns:r="http://schemas.openxmlformats.org/officeDocument/2006/relationships" xmlns:a="http://schemas.openxmlformats.org/drawingml/2006/main" r:embed="R7ace3c4e6760496f">
+          <a:blip xmlns:r="http://schemas.openxmlformats.org/officeDocument/2006/relationships" xmlns:a="http://schemas.openxmlformats.org/drawingml/2006/main" r:embed="R7f5a5d7933b7493f">
             <a:alphaModFix/>
           </a:blip>
           <a:srcRect xmlns:a="http://schemas.openxmlformats.org/drawingml/2006/main" l="0" t="0" r="0" b="0"/>
@@ -25720,22 +25614,22 @@
   </p:cSld>
   <p:clrMap bg1="lt1" tx1="dk1" bg2="dk2" tx2="lt2" accent1="accent1" accent2="accent2" accent3="accent3" accent4="accent4" accent5="accent5" accent6="accent6" hlink="hlink" folHlink="folHlink"/>
   <p:sldLayoutIdLst>
-    <p:sldLayoutId xmlns:r="http://schemas.openxmlformats.org/officeDocument/2006/relationships" id="2147483649" r:id="R586ff5d53a8346c4"/>
-    <p:sldLayoutId xmlns:r="http://schemas.openxmlformats.org/officeDocument/2006/relationships" id="2147483650" r:id="Rc3e252e1448c4866"/>
-    <p:sldLayoutId xmlns:r="http://schemas.openxmlformats.org/officeDocument/2006/relationships" id="2147483651" r:id="Rfc4dd40fa104474a"/>
-    <p:sldLayoutId xmlns:r="http://schemas.openxmlformats.org/officeDocument/2006/relationships" id="2147483652" r:id="Ra0352b6114f04f76"/>
-    <p:sldLayoutId xmlns:r="http://schemas.openxmlformats.org/officeDocument/2006/relationships" id="2147483653" r:id="R576021f8b90345bf"/>
-    <p:sldLayoutId xmlns:r="http://schemas.openxmlformats.org/officeDocument/2006/relationships" id="2147483654" r:id="Rba1bcafebaca4405"/>
-    <p:sldLayoutId xmlns:r="http://schemas.openxmlformats.org/officeDocument/2006/relationships" id="2147483655" r:id="R65381b3073dc45af"/>
-    <p:sldLayoutId xmlns:r="http://schemas.openxmlformats.org/officeDocument/2006/relationships" id="2147483656" r:id="R4cf03bf526744d1d"/>
-    <p:sldLayoutId xmlns:r="http://schemas.openxmlformats.org/officeDocument/2006/relationships" id="2147483657" r:id="R79685ed901a945f3"/>
-    <p:sldLayoutId xmlns:r="http://schemas.openxmlformats.org/officeDocument/2006/relationships" id="2147483658" r:id="R2cf47db3b5594b12"/>
-    <p:sldLayoutId xmlns:r="http://schemas.openxmlformats.org/officeDocument/2006/relationships" id="2147483659" r:id="R3a99aa15bb184a9a"/>
-    <p:sldLayoutId xmlns:r="http://schemas.openxmlformats.org/officeDocument/2006/relationships" id="2147483660" r:id="R899b4df6ab0d46ac"/>
-    <p:sldLayoutId xmlns:r="http://schemas.openxmlformats.org/officeDocument/2006/relationships" id="2147483661" r:id="Rbcfd6d996ae04eb0"/>
-    <p:sldLayoutId xmlns:r="http://schemas.openxmlformats.org/officeDocument/2006/relationships" id="2147483662" r:id="Rf783dd73a94f4e68"/>
-    <p:sldLayoutId xmlns:r="http://schemas.openxmlformats.org/officeDocument/2006/relationships" id="2147483663" r:id="R581a778404ce40e0"/>
-    <p:sldLayoutId xmlns:r="http://schemas.openxmlformats.org/officeDocument/2006/relationships" id="2147483664" r:id="Rdbc0b50cc7464bf1"/>
+    <p:sldLayoutId xmlns:r="http://schemas.openxmlformats.org/officeDocument/2006/relationships" id="2147483649" r:id="R7dacc843c23f4871"/>
+    <p:sldLayoutId xmlns:r="http://schemas.openxmlformats.org/officeDocument/2006/relationships" id="2147483650" r:id="Rc2714e1cfc334b9f"/>
+    <p:sldLayoutId xmlns:r="http://schemas.openxmlformats.org/officeDocument/2006/relationships" id="2147483651" r:id="R93bc5f9216094be5"/>
+    <p:sldLayoutId xmlns:r="http://schemas.openxmlformats.org/officeDocument/2006/relationships" id="2147483652" r:id="R92f2ebb9f62b4d9a"/>
+    <p:sldLayoutId xmlns:r="http://schemas.openxmlformats.org/officeDocument/2006/relationships" id="2147483653" r:id="R5fde31a9885d4192"/>
+    <p:sldLayoutId xmlns:r="http://schemas.openxmlformats.org/officeDocument/2006/relationships" id="2147483654" r:id="R4ba6cad8816f4340"/>
+    <p:sldLayoutId xmlns:r="http://schemas.openxmlformats.org/officeDocument/2006/relationships" id="2147483655" r:id="R043665f919224580"/>
+    <p:sldLayoutId xmlns:r="http://schemas.openxmlformats.org/officeDocument/2006/relationships" id="2147483656" r:id="Rdbb6c93bc8e4427e"/>
+    <p:sldLayoutId xmlns:r="http://schemas.openxmlformats.org/officeDocument/2006/relationships" id="2147483657" r:id="R3d5023245f564054"/>
+    <p:sldLayoutId xmlns:r="http://schemas.openxmlformats.org/officeDocument/2006/relationships" id="2147483658" r:id="Rd265cec2b4a74202"/>
+    <p:sldLayoutId xmlns:r="http://schemas.openxmlformats.org/officeDocument/2006/relationships" id="2147483659" r:id="Rf78f4ea8dd6543f5"/>
+    <p:sldLayoutId xmlns:r="http://schemas.openxmlformats.org/officeDocument/2006/relationships" id="2147483660" r:id="R66c8275fa1e846ae"/>
+    <p:sldLayoutId xmlns:r="http://schemas.openxmlformats.org/officeDocument/2006/relationships" id="2147483661" r:id="R36a27e8e04034c89"/>
+    <p:sldLayoutId xmlns:r="http://schemas.openxmlformats.org/officeDocument/2006/relationships" id="2147483662" r:id="R2cf849d6846c4f4f"/>
+    <p:sldLayoutId xmlns:r="http://schemas.openxmlformats.org/officeDocument/2006/relationships" id="2147483663" r:id="R075e2ed4ebff4eb3"/>
+    <p:sldLayoutId xmlns:r="http://schemas.openxmlformats.org/officeDocument/2006/relationships" id="2147483664" r:id="R8c615b77190f4bc4"/>
   </p:sldLayoutIdLst>
   <p:hf hdr="0" ftr="0" dt="0"/>
   <p:txStyles>
@@ -27928,7 +27822,7 @@
           <p:nvPr/>
         </p:nvPicPr>
         <p:blipFill rotWithShape="1">
-          <a:blip xmlns:r="http://schemas.openxmlformats.org/officeDocument/2006/relationships" xmlns:a="http://schemas.openxmlformats.org/drawingml/2006/main" r:embed="Rd010b6aab26e43b7">
+          <a:blip xmlns:r="http://schemas.openxmlformats.org/officeDocument/2006/relationships" xmlns:a="http://schemas.openxmlformats.org/drawingml/2006/main" r:embed="R99aa68aad0734164">
             <a:alphaModFix/>
           </a:blip>
           <a:srcRect xmlns:a="http://schemas.openxmlformats.org/drawingml/2006/main" l="0" t="0" r="0" b="0"/>
@@ -27951,19 +27845,19 @@
   </p:cSld>
   <p:clrMap bg1="lt1" tx1="dk1" bg2="dk2" tx2="lt2" accent1="accent1" accent2="accent2" accent3="accent3" accent4="accent4" accent5="accent5" accent6="accent6" hlink="hlink" folHlink="folHlink"/>
   <p:sldLayoutIdLst>
-    <p:sldLayoutId xmlns:r="http://schemas.openxmlformats.org/officeDocument/2006/relationships" id="2147483666" r:id="R7b1ef156ef444213"/>
-    <p:sldLayoutId xmlns:r="http://schemas.openxmlformats.org/officeDocument/2006/relationships" id="2147483667" r:id="Ref8d92015f424aa6"/>
-    <p:sldLayoutId xmlns:r="http://schemas.openxmlformats.org/officeDocument/2006/relationships" id="2147483668" r:id="Rff26b9a4df8e4570"/>
-    <p:sldLayoutId xmlns:r="http://schemas.openxmlformats.org/officeDocument/2006/relationships" id="2147483669" r:id="R50977e2d77c6446c"/>
-    <p:sldLayoutId xmlns:r="http://schemas.openxmlformats.org/officeDocument/2006/relationships" id="2147483670" r:id="Rfd917279f76f40ff"/>
-    <p:sldLayoutId xmlns:r="http://schemas.openxmlformats.org/officeDocument/2006/relationships" id="2147483671" r:id="Re56283eb3bf94dbf"/>
-    <p:sldLayoutId xmlns:r="http://schemas.openxmlformats.org/officeDocument/2006/relationships" id="2147483672" r:id="R820f9fc64891419a"/>
-    <p:sldLayoutId xmlns:r="http://schemas.openxmlformats.org/officeDocument/2006/relationships" id="2147483673" r:id="R31d6bfc665cb4be9"/>
-    <p:sldLayoutId xmlns:r="http://schemas.openxmlformats.org/officeDocument/2006/relationships" id="2147483674" r:id="Rc9f88048c6444ede"/>
-    <p:sldLayoutId xmlns:r="http://schemas.openxmlformats.org/officeDocument/2006/relationships" id="2147483675" r:id="R2983fddce4fa4ece"/>
-    <p:sldLayoutId xmlns:r="http://schemas.openxmlformats.org/officeDocument/2006/relationships" id="2147483676" r:id="R6cd3eee5c0a5481f"/>
-    <p:sldLayoutId xmlns:r="http://schemas.openxmlformats.org/officeDocument/2006/relationships" id="2147483677" r:id="R9a44ba55e82a4c92"/>
-    <p:sldLayoutId xmlns:r="http://schemas.openxmlformats.org/officeDocument/2006/relationships" id="2147483678" r:id="R4510029633884fae"/>
+    <p:sldLayoutId xmlns:r="http://schemas.openxmlformats.org/officeDocument/2006/relationships" id="2147483666" r:id="R86a2d9bd73cc4b7b"/>
+    <p:sldLayoutId xmlns:r="http://schemas.openxmlformats.org/officeDocument/2006/relationships" id="2147483667" r:id="R3bcacb1afcd4402e"/>
+    <p:sldLayoutId xmlns:r="http://schemas.openxmlformats.org/officeDocument/2006/relationships" id="2147483668" r:id="R17ec190a67034525"/>
+    <p:sldLayoutId xmlns:r="http://schemas.openxmlformats.org/officeDocument/2006/relationships" id="2147483669" r:id="Rddf29c9efdc04f08"/>
+    <p:sldLayoutId xmlns:r="http://schemas.openxmlformats.org/officeDocument/2006/relationships" id="2147483670" r:id="R82c09cce37fb46bd"/>
+    <p:sldLayoutId xmlns:r="http://schemas.openxmlformats.org/officeDocument/2006/relationships" id="2147483671" r:id="R4f41b6bbd5bc443d"/>
+    <p:sldLayoutId xmlns:r="http://schemas.openxmlformats.org/officeDocument/2006/relationships" id="2147483672" r:id="R41192d4b62dc4173"/>
+    <p:sldLayoutId xmlns:r="http://schemas.openxmlformats.org/officeDocument/2006/relationships" id="2147483673" r:id="Re81a19e15d104246"/>
+    <p:sldLayoutId xmlns:r="http://schemas.openxmlformats.org/officeDocument/2006/relationships" id="2147483674" r:id="R66b9d2da6a114b62"/>
+    <p:sldLayoutId xmlns:r="http://schemas.openxmlformats.org/officeDocument/2006/relationships" id="2147483675" r:id="R82844b48d5904575"/>
+    <p:sldLayoutId xmlns:r="http://schemas.openxmlformats.org/officeDocument/2006/relationships" id="2147483676" r:id="R87fbd78e114a4a15"/>
+    <p:sldLayoutId xmlns:r="http://schemas.openxmlformats.org/officeDocument/2006/relationships" id="2147483677" r:id="Rf4b885f9c8cc49c4"/>
+    <p:sldLayoutId xmlns:r="http://schemas.openxmlformats.org/officeDocument/2006/relationships" id="2147483678" r:id="R3f397c56f81b46be"/>
   </p:sldLayoutIdLst>
   <p:hf hdr="0" ftr="0" dt="0"/>
   <p:txStyles>
@@ -29368,7 +29262,7 @@
           <a:lstStyle xmlns:a="http://schemas.openxmlformats.org/drawingml/2006/main"/>
           <a:p xmlns:a="http://schemas.openxmlformats.org/drawingml/2006/main">
             <a:r>
-              <a:t>Why this is useful to oneDAL at first glance</a:t>
+              <a:t>What the skill tells an agent today</a:t>
             </a:r>
           </a:p>
         </p:txBody>
@@ -29418,7 +29312,7 @@
                   <a:srgbClr val="000000"/>
                 </a:solidFill>
               </a:rPr>
-              <a:t> Choose the right integration path</a:t>
+              <a:t> Select sklearn extension, native C++, or DAAL maintenance</a:t>
             </a:r>
             <a:r>
               <a:rPr sz="1913">
@@ -29426,7 +29320,7 @@
                   <a:srgbClr val="000000"/>
                 </a:solidFill>
               </a:rPr>
-              <a:t> — Minimal-change sklearn acceleration and native oneAPI C++ solve different user needs.</a:t>
+              <a:t> — The answer depends on change tolerance, queue control, language, and legacy context.</a:t>
             </a:r>
           </a:p>
           <a:p xmlns:a="http://schemas.openxmlformats.org/drawingml/2006/main">
@@ -29447,7 +29341,7 @@
                   <a:srgbClr val="000000"/>
                 </a:solidFill>
               </a:rPr>
-              <a:t> Protect data semantics</a:t>
+              <a:t> Define the analytics contract</a:t>
             </a:r>
             <a:r>
               <a:rPr sz="1913">
@@ -29455,7 +29349,7 @@
                   <a:srgbClr val="000000"/>
                 </a:solidFill>
               </a:rPr>
-              <a:t> — Row/column orientation, sparse/dense layout, preprocessing, seeds, and metrics are observable behavior.</a:t>
+              <a:t> — Preprocessing, split, parameters, seeds, outputs, metric, and tolerance.</a:t>
             </a:r>
           </a:p>
           <a:p xmlns:a="http://schemas.openxmlformats.org/drawingml/2006/main">
@@ -29476,7 +29370,7 @@
                   <a:srgbClr val="000000"/>
                 </a:solidFill>
               </a:rPr>
-              <a:t> Use modes for workloads — not marketing</a:t>
+              <a:t> Map tables deliberately</a:t>
             </a:r>
             <a:r>
               <a:rPr sz="1913">
@@ -29484,7 +29378,7 @@
                   <a:srgbClr val="000000"/>
                 </a:solidFill>
               </a:rPr>
-              <a:t> — Batch, online, and distributed choices follow data arrival, memory, and real rank topology.</a:t>
+              <a:t> — Use rectangular fixtures to expose orientation bugs that square data can hide.</a:t>
             </a:r>
           </a:p>
           <a:p xmlns:a="http://schemas.openxmlformats.org/drawingml/2006/main">
@@ -29505,7 +29399,7 @@
                   <a:srgbClr val="000000"/>
                 </a:solidFill>
               </a:rPr>
-              <a:t> Measure the whole path</a:t>
+              <a:t> Validate each computation mode</a:t>
             </a:r>
             <a:r>
               <a:rPr sz="1913">
@@ -29513,7 +29407,36 @@
                   <a:srgbClr val="000000"/>
                 </a:solidFill>
               </a:rPr>
-              <a:t> — Conversion and Python boundary costs remain in scope before any acceleration claim.</a:t>
+              <a:t> — Chunk coverage and finalization for online; partitions, rank participation, and merge for distributed.</a:t>
+            </a:r>
+          </a:p>
+          <a:p xmlns:a="http://schemas.openxmlformats.org/drawingml/2006/main">
+            <a:pPr marL="30" indent="-18">
+              <a:spcAft>
+                <a:spcPts val="10"/>
+              </a:spcAft>
+              <a:buChar char="•"/>
+              <a:defRPr sz="1913">
+                <a:solidFill>
+                  <a:srgbClr val="000000"/>
+                </a:solidFill>
+              </a:defRPr>
+            </a:pPr>
+            <a:r>
+              <a:rPr sz="1913" b="1">
+                <a:solidFill>
+                  <a:srgbClr val="000000"/>
+                </a:solidFill>
+              </a:rPr>
+              <a:t> Benchmark only after parity</a:t>
+            </a:r>
+            <a:r>
+              <a:rPr sz="1913">
+                <a:solidFill>
+                  <a:srgbClr val="000000"/>
+                </a:solidFill>
+              </a:rPr>
+              <a:t> — Include conversion, communication, synchronization, and environment.</a:t>
             </a:r>
           </a:p>
         </p:txBody>
@@ -29605,7 +29528,7 @@
           <a:lstStyle xmlns:a="http://schemas.openxmlformats.org/drawingml/2006/main"/>
           <a:p xmlns:a="http://schemas.openxmlformats.org/drawingml/2006/main">
             <a:r>
-              <a:t>What the skill tells an agent today</a:t>
+              <a:t>Evaluation inventory: 5 implemented, 1 honest gap</a:t>
             </a:r>
           </a:p>
         </p:txBody>
@@ -29655,7 +29578,7 @@
                   <a:srgbClr val="000000"/>
                 </a:solidFill>
               </a:rPr>
-              <a:t> Select sklearn extension, native C++, or DAAL maintenance</a:t>
+              <a:t> Implemented</a:t>
             </a:r>
             <a:r>
               <a:rPr sz="1913">
@@ -29663,7 +29586,7 @@
                   <a:srgbClr val="000000"/>
                 </a:solidFill>
               </a:rPr>
-              <a:t> — The answer depends on change tolerance, queue control, language, and legacy context.</a:t>
+              <a:t> — sklearn-or-native KMeans; table orientation regression; batch/online/distributed choice; conversion-cost benchmark; Extra Trees random split.</a:t>
             </a:r>
           </a:p>
           <a:p xmlns:a="http://schemas.openxmlformats.org/drawingml/2006/main">
@@ -29684,7 +29607,7 @@
                   <a:srgbClr val="000000"/>
                 </a:solidFill>
               </a:rPr>
-              <a:t> Define the analytics contract</a:t>
+              <a:t> Incident evidence</a:t>
             </a:r>
             <a:r>
               <a:rPr sz="1913">
@@ -29692,7 +29615,7 @@
                   <a:srgbClr val="000000"/>
                 </a:solidFill>
               </a:rPr>
-              <a:t> — Preprocessing, split, parameters, seeds, outputs, metric, and tolerance.</a:t>
+              <a:t> — The Extra Trees task is sourced from a maintainer incident.</a:t>
             </a:r>
           </a:p>
           <a:p xmlns:a="http://schemas.openxmlformats.org/drawingml/2006/main">
@@ -29713,7 +29636,7 @@
                   <a:srgbClr val="000000"/>
                 </a:solidFill>
               </a:rPr>
-              <a:t> Map tables deliberately</a:t>
+              <a:t> Planned</a:t>
             </a:r>
             <a:r>
               <a:rPr sz="1913">
@@ -29721,7 +29644,7 @@
                   <a:srgbClr val="000000"/>
                 </a:solidFill>
               </a:rPr>
-              <a:t> — Use rectangular fixtures to expose orientation bugs that square data can hide.</a:t>
+              <a:t> — An authentic unavailable-GPU-path case on a declared target.</a:t>
             </a:r>
           </a:p>
           <a:p xmlns:a="http://schemas.openxmlformats.org/drawingml/2006/main">
@@ -29742,7 +29665,7 @@
                   <a:srgbClr val="000000"/>
                 </a:solidFill>
               </a:rPr>
-              <a:t> Validate each computation mode</a:t>
+              <a:t> What this proves</a:t>
             </a:r>
             <a:r>
               <a:rPr sz="1913">
@@ -29750,36 +29673,7 @@
                   <a:srgbClr val="000000"/>
                 </a:solidFill>
               </a:rPr>
-              <a:t> — Chunk coverage and finalization for online; partitions, rank participation, and merge for distributed.</a:t>
-            </a:r>
-          </a:p>
-          <a:p xmlns:a="http://schemas.openxmlformats.org/drawingml/2006/main">
-            <a:pPr marL="30" indent="-18">
-              <a:spcAft>
-                <a:spcPts val="10"/>
-              </a:spcAft>
-              <a:buChar char="•"/>
-              <a:defRPr sz="1913">
-                <a:solidFill>
-                  <a:srgbClr val="000000"/>
-                </a:solidFill>
-              </a:defRPr>
-            </a:pPr>
-            <a:r>
-              <a:rPr sz="1913" b="1">
-                <a:solidFill>
-                  <a:srgbClr val="000000"/>
-                </a:solidFill>
-              </a:rPr>
-              <a:t> Benchmark only after parity</a:t>
-            </a:r>
-            <a:r>
-              <a:rPr sz="1913">
-                <a:solidFill>
-                  <a:srgbClr val="000000"/>
-                </a:solidFill>
-              </a:rPr>
-              <a:t> — Include conversion, communication, synchronization, and environment.</a:t>
+              <a:t> — The suite checks path selection, semantics, and evidence discipline — not every algorithm/device combination.</a:t>
             </a:r>
           </a:p>
         </p:txBody>
@@ -29871,7 +29765,7 @@
           <a:lstStyle xmlns:a="http://schemas.openxmlformats.org/drawingml/2006/main"/>
           <a:p xmlns:a="http://schemas.openxmlformats.org/drawingml/2006/main">
             <a:r>
-              <a:t>Evaluation inventory: 5 implemented, 1 honest gap</a:t>
+              <a:t>How we chose the content</a:t>
             </a:r>
           </a:p>
         </p:txBody>
@@ -29921,7 +29815,7 @@
                   <a:srgbClr val="000000"/>
                 </a:solidFill>
               </a:rPr>
-              <a:t> Implemented</a:t>
+              <a:t> Official sources</a:t>
             </a:r>
             <a:r>
               <a:rPr sz="1913">
@@ -29929,7 +29823,7 @@
                   <a:srgbClr val="000000"/>
                 </a:solidFill>
               </a:rPr>
-              <a:t> — sklearn-or-native KMeans; table orientation regression; batch/online/distributed choice; conversion-cost benchmark; Extra Trees random split.</a:t>
+              <a:t> — Project docs, examples, release state, algorithm/API guidance, and ownership files.</a:t>
             </a:r>
           </a:p>
           <a:p xmlns:a="http://schemas.openxmlformats.org/drawingml/2006/main">
@@ -29950,7 +29844,7 @@
                   <a:srgbClr val="000000"/>
                 </a:solidFill>
               </a:rPr>
-              <a:t> Incident evidence</a:t>
+              <a:t> High-cost failure boundaries</a:t>
             </a:r>
             <a:r>
               <a:rPr sz="1913">
@@ -29958,7 +29852,7 @@
                   <a:srgbClr val="000000"/>
                 </a:solidFill>
               </a:rPr>
-              <a:t> — The Extra Trees task is sourced from a maintainer incident.</a:t>
+              <a:t> — Wrong API path, transposed tables, unsuitable computation mode, quality drift, and hidden conversion cost.</a:t>
             </a:r>
           </a:p>
           <a:p xmlns:a="http://schemas.openxmlformats.org/drawingml/2006/main">
@@ -29979,7 +29873,7 @@
                   <a:srgbClr val="000000"/>
                 </a:solidFill>
               </a:rPr>
-              <a:t> Planned</a:t>
+              <a:t> Project-level truth</a:t>
             </a:r>
             <a:r>
               <a:rPr sz="1913">
@@ -29987,7 +29881,7 @@
                   <a:srgbClr val="000000"/>
                 </a:solidFill>
               </a:rPr>
-              <a:t> — An authentic unavailable-GPU-path case on a declared target.</a:t>
+              <a:t> — Exact algorithm/interface/version/device availability must be checked rather than copied into a static matrix.</a:t>
             </a:r>
           </a:p>
           <a:p xmlns:a="http://schemas.openxmlformats.org/drawingml/2006/main">
@@ -30008,7 +29902,7 @@
                   <a:srgbClr val="000000"/>
                 </a:solidFill>
               </a:rPr>
-              <a:t> What this proves</a:t>
+              <a:t> Measured restraint</a:t>
             </a:r>
             <a:r>
               <a:rPr sz="1913">
@@ -30016,7 +29910,7 @@
                   <a:srgbClr val="000000"/>
                 </a:solidFill>
               </a:rPr>
-              <a:t> — The suite checks path selection, semantics, and evidence discipline — not every algorithm/device combination.</a:t>
+              <a:t> — A tiny-corpus agentic prototype was kept as a no-go result, not promoted as a speedup.</a:t>
             </a:r>
           </a:p>
         </p:txBody>
@@ -30108,7 +30002,7 @@
           <a:lstStyle xmlns:a="http://schemas.openxmlformats.org/drawingml/2006/main"/>
           <a:p xmlns:a="http://schemas.openxmlformats.org/drawingml/2006/main">
             <a:r>
-              <a:t>How we chose the content</a:t>
+              <a:t>What project ownership would look like</a:t>
             </a:r>
           </a:p>
         </p:txBody>
@@ -30158,7 +30052,7 @@
                   <a:srgbClr val="000000"/>
                 </a:solidFill>
               </a:rPr>
-              <a:t> Official sources</a:t>
+              <a:t> Review scope and migration nuance</a:t>
             </a:r>
             <a:r>
               <a:rPr sz="1913">
@@ -30166,7 +30060,7 @@
                   <a:srgbClr val="000000"/>
                 </a:solidFill>
               </a:rPr>
-              <a:t> — Project docs, examples, release state, algorithm/API guidance, and ownership files.</a:t>
+              <a:t> — Especially sklearn/native boundaries, oneAPI versus DAAL, and mode availability.</a:t>
             </a:r>
           </a:p>
           <a:p xmlns:a="http://schemas.openxmlformats.org/drawingml/2006/main">
@@ -30187,7 +30081,7 @@
                   <a:srgbClr val="000000"/>
                 </a:solidFill>
               </a:rPr>
-              <a:t> High-cost failure boundaries</a:t>
+              <a:t> Validate parity language</a:t>
             </a:r>
             <a:r>
               <a:rPr sz="1913">
@@ -30195,7 +30089,7 @@
                   <a:srgbClr val="000000"/>
                 </a:solidFill>
               </a:rPr>
-              <a:t> — Wrong API path, transposed tables, unsuitable computation mode, quality drift, and hidden conversion cost.</a:t>
+              <a:t> — Which outputs require exact, tolerance-based, or metric-based comparison?</a:t>
             </a:r>
           </a:p>
           <a:p xmlns:a="http://schemas.openxmlformats.org/drawingml/2006/main">
@@ -30216,7 +30110,7 @@
                   <a:srgbClr val="000000"/>
                 </a:solidFill>
               </a:rPr>
-              <a:t> Project-level truth</a:t>
+              <a:t> Nominate real failures</a:t>
             </a:r>
             <a:r>
               <a:rPr sz="1913">
@@ -30224,7 +30118,7 @@
                   <a:srgbClr val="000000"/>
                 </a:solidFill>
               </a:rPr>
-              <a:t> — Exact algorithm/interface/version/device availability must be checked rather than copied into a static matrix.</a:t>
+              <a:t> — Prefer authentic algorithm, table, or device incidents over synthetic coverage.</a:t>
             </a:r>
           </a:p>
           <a:p xmlns:a="http://schemas.openxmlformats.org/drawingml/2006/main">
@@ -30245,7 +30139,7 @@
                   <a:srgbClr val="000000"/>
                 </a:solidFill>
               </a:rPr>
-              <a:t> Measured restraint</a:t>
+              <a:t> UXL keeps the machinery</a:t>
             </a:r>
             <a:r>
               <a:rPr sz="1913">
@@ -30253,7 +30147,7 @@
                   <a:srgbClr val="000000"/>
                 </a:solidFill>
               </a:rPr>
-              <a:t> — A tiny-corpus agentic prototype was kept as a no-go result, not promoted as a speedup.</a:t>
+              <a:t> — Common evaluator policy, tasks, dashboards, hosted CI, and specialized runner contracts.</a:t>
             </a:r>
           </a:p>
         </p:txBody>
@@ -30345,243 +30239,6 @@
           <a:lstStyle xmlns:a="http://schemas.openxmlformats.org/drawingml/2006/main"/>
           <a:p xmlns:a="http://schemas.openxmlformats.org/drawingml/2006/main">
             <a:r>
-              <a:t>What project ownership would look like</a:t>
-            </a:r>
-          </a:p>
-        </p:txBody>
-      </p:sp>
-      <p:sp>
-        <p:nvSpPr>
-          <p:cNvPr id="3" name="Content Placeholder 2">
-            <a:extLst xmlns:a="http://schemas.openxmlformats.org/drawingml/2006/main">
-              <a:ext uri="{FF2B5EF4-FFF2-40B4-BE49-F238E27FC236}">
-                <a16:creationId xmlns:a16="http://schemas.microsoft.com/office/drawing/2014/main" id="{ECF5C9F1-2691-0BC9-F1E1-01CECB857FE3}"/>
-              </a:ext>
-            </a:extLst>
-          </p:cNvPr>
-          <p:cNvSpPr>
-            <a:spLocks xmlns:a="http://schemas.openxmlformats.org/drawingml/2006/main" noGrp="1"/>
-          </p:cNvSpPr>
-          <p:nvPr>
-            <p:ph type="body" idx="1"/>
-          </p:nvPr>
-        </p:nvSpPr>
-        <p:spPr>
-          <a:xfrm xmlns:a="http://schemas.openxmlformats.org/drawingml/2006/main">
-            <a:off x="838200" y="1825625"/>
-            <a:ext cx="10515600" cy="4351200"/>
-          </a:xfrm>
-        </p:spPr>
-        <p:txBody>
-          <a:bodyPr xmlns:a="http://schemas.openxmlformats.org/drawingml/2006/main" wrap="square" anchor="t">
-            <a:normAutofit fontScale="100000"/>
-          </a:bodyPr>
-          <a:lstStyle xmlns:a="http://schemas.openxmlformats.org/drawingml/2006/main"/>
-          <a:p xmlns:a="http://schemas.openxmlformats.org/drawingml/2006/main">
-            <a:pPr marL="30" indent="-18">
-              <a:spcAft>
-                <a:spcPts val="10"/>
-              </a:spcAft>
-              <a:buChar char="•"/>
-              <a:defRPr sz="1913">
-                <a:solidFill>
-                  <a:srgbClr val="000000"/>
-                </a:solidFill>
-              </a:defRPr>
-            </a:pPr>
-            <a:r>
-              <a:rPr sz="1913" b="1">
-                <a:solidFill>
-                  <a:srgbClr val="000000"/>
-                </a:solidFill>
-              </a:rPr>
-              <a:t> Review scope and migration nuance</a:t>
-            </a:r>
-            <a:r>
-              <a:rPr sz="1913">
-                <a:solidFill>
-                  <a:srgbClr val="000000"/>
-                </a:solidFill>
-              </a:rPr>
-              <a:t> — Especially sklearn/native boundaries, oneAPI versus DAAL, and mode availability.</a:t>
-            </a:r>
-          </a:p>
-          <a:p xmlns:a="http://schemas.openxmlformats.org/drawingml/2006/main">
-            <a:pPr marL="30" indent="-18">
-              <a:spcAft>
-                <a:spcPts val="10"/>
-              </a:spcAft>
-              <a:buChar char="•"/>
-              <a:defRPr sz="1913">
-                <a:solidFill>
-                  <a:srgbClr val="000000"/>
-                </a:solidFill>
-              </a:defRPr>
-            </a:pPr>
-            <a:r>
-              <a:rPr sz="1913" b="1">
-                <a:solidFill>
-                  <a:srgbClr val="000000"/>
-                </a:solidFill>
-              </a:rPr>
-              <a:t> Validate parity language</a:t>
-            </a:r>
-            <a:r>
-              <a:rPr sz="1913">
-                <a:solidFill>
-                  <a:srgbClr val="000000"/>
-                </a:solidFill>
-              </a:rPr>
-              <a:t> — Which outputs require exact, tolerance-based, or metric-based comparison?</a:t>
-            </a:r>
-          </a:p>
-          <a:p xmlns:a="http://schemas.openxmlformats.org/drawingml/2006/main">
-            <a:pPr marL="30" indent="-18">
-              <a:spcAft>
-                <a:spcPts val="10"/>
-              </a:spcAft>
-              <a:buChar char="•"/>
-              <a:defRPr sz="1913">
-                <a:solidFill>
-                  <a:srgbClr val="000000"/>
-                </a:solidFill>
-              </a:defRPr>
-            </a:pPr>
-            <a:r>
-              <a:rPr sz="1913" b="1">
-                <a:solidFill>
-                  <a:srgbClr val="000000"/>
-                </a:solidFill>
-              </a:rPr>
-              <a:t> Nominate real failures</a:t>
-            </a:r>
-            <a:r>
-              <a:rPr sz="1913">
-                <a:solidFill>
-                  <a:srgbClr val="000000"/>
-                </a:solidFill>
-              </a:rPr>
-              <a:t> — Prefer authentic algorithm, table, or device incidents over synthetic coverage.</a:t>
-            </a:r>
-          </a:p>
-          <a:p xmlns:a="http://schemas.openxmlformats.org/drawingml/2006/main">
-            <a:pPr marL="30" indent="-18">
-              <a:spcAft>
-                <a:spcPts val="10"/>
-              </a:spcAft>
-              <a:buChar char="•"/>
-              <a:defRPr sz="1913">
-                <a:solidFill>
-                  <a:srgbClr val="000000"/>
-                </a:solidFill>
-              </a:defRPr>
-            </a:pPr>
-            <a:r>
-              <a:rPr sz="1913" b="1">
-                <a:solidFill>
-                  <a:srgbClr val="000000"/>
-                </a:solidFill>
-              </a:rPr>
-              <a:t> UXL keeps the machinery</a:t>
-            </a:r>
-            <a:r>
-              <a:rPr sz="1913">
-                <a:solidFill>
-                  <a:srgbClr val="000000"/>
-                </a:solidFill>
-              </a:rPr>
-              <a:t> — Common evaluator policy, tasks, dashboards, hosted CI, and specialized runner contracts.</a:t>
-            </a:r>
-          </a:p>
-        </p:txBody>
-      </p:sp>
-      <p:sp>
-        <p:nvSpPr>
-          <p:cNvPr id="7" name="TextBox 6">
-            <a:extLst xmlns:a="http://schemas.openxmlformats.org/drawingml/2006/main">
-              <a:ext uri="{FF2B5EF4-FFF2-40B4-BE49-F238E27FC236}">
-                <a16:creationId xmlns:a16="http://schemas.microsoft.com/office/drawing/2014/main" id="{E2E6F043-0F84-54F7-A567-6E5851801779}"/>
-              </a:ext>
-            </a:extLst>
-          </p:cNvPr>
-          <p:cNvSpPr>
-            <a:spLocks xmlns:a="http://schemas.openxmlformats.org/drawingml/2006/main" noGrp="1"/>
-          </p:cNvSpPr>
-          <p:nvPr/>
-        </p:nvSpPr>
-        <p:spPr>
-          <a:xfrm xmlns:a="http://schemas.openxmlformats.org/drawingml/2006/main">
-            <a:off x="696174" y="6338986"/>
-            <a:ext cx="284052" cy="307777"/>
-          </a:xfrm>
-          <a:prstGeom xmlns:a="http://schemas.openxmlformats.org/drawingml/2006/main" prst="rect">
-            <a:avLst/>
-          </a:prstGeom>
-          <a:noFill xmlns:a="http://schemas.openxmlformats.org/drawingml/2006/main"/>
-        </p:spPr>
-        <p:txBody>
-          <a:bodyPr xmlns:a="http://schemas.openxmlformats.org/drawingml/2006/main" wrap="none">
-            <a:spAutoFit/>
-          </a:bodyPr>
-          <a:lstStyle xmlns:a="http://schemas.openxmlformats.org/drawingml/2006/main"/>
-          <a:p xmlns:a="http://schemas.openxmlformats.org/drawingml/2006/main">
-            <a:r>
-              <a:t>6</a:t>
-            </a:r>
-          </a:p>
-        </p:txBody>
-      </p:sp>
-    </p:spTree>
-    <p:extLst>
-      <p:ext uri="{BB962C8B-B14F-4D97-AF65-F5344CB8AC3E}">
-        <p14:creationId xmlns:p14="http://schemas.microsoft.com/office/powerpoint/2010/main" val="1742728663"/>
-      </p:ext>
-    </p:extLst>
-  </p:cSld>
-</p:sld>
-</file>
-
-<file path=ppt/slides/slide7.xml><?xml version="1.0" encoding="utf-8"?>
-<p:sld xmlns:p="http://schemas.openxmlformats.org/presentationml/2006/main">
-  <p:cSld>
-    <p:spTree>
-      <p:nvGrpSpPr>
-        <p:cNvPr id="1" name=""/>
-        <p:cNvGrpSpPr/>
-        <p:nvPr/>
-      </p:nvGrpSpPr>
-      <p:grpSpPr>
-        <a:xfrm xmlns:a="http://schemas.openxmlformats.org/drawingml/2006/main"/>
-      </p:grpSpPr>
-      <p:sp>
-        <p:nvSpPr>
-          <p:cNvPr id="2" name="Title 1">
-            <a:extLst xmlns:a="http://schemas.openxmlformats.org/drawingml/2006/main">
-              <a:ext uri="{FF2B5EF4-FFF2-40B4-BE49-F238E27FC236}">
-                <a16:creationId xmlns:a16="http://schemas.microsoft.com/office/drawing/2014/main" id="{F64C2A24-546D-C55C-2C52-97A4957F67E0}"/>
-              </a:ext>
-            </a:extLst>
-          </p:cNvPr>
-          <p:cNvSpPr>
-            <a:spLocks xmlns:a="http://schemas.openxmlformats.org/drawingml/2006/main" noGrp="1"/>
-          </p:cNvSpPr>
-          <p:nvPr>
-            <p:ph type="title" idx="0"/>
-          </p:nvPr>
-        </p:nvSpPr>
-        <p:spPr>
-          <a:xfrm xmlns:a="http://schemas.openxmlformats.org/drawingml/2006/main">
-            <a:off x="838200" y="365125"/>
-            <a:ext cx="10515600" cy="1325700"/>
-          </a:xfrm>
-        </p:spPr>
-        <p:txBody>
-          <a:bodyPr xmlns:a="http://schemas.openxmlformats.org/drawingml/2006/main">
-            <a:normAutofit fontScale="100000"/>
-          </a:bodyPr>
-          <a:lstStyle xmlns:a="http://schemas.openxmlformats.org/drawingml/2006/main"/>
-          <a:p xmlns:a="http://schemas.openxmlformats.org/drawingml/2006/main">
-            <a:r>
               <a:t>A focused 30-minute maintainer review</a:t>
             </a:r>
           </a:p>
@@ -30792,7 +30449,7 @@
           <a:lstStyle xmlns:a="http://schemas.openxmlformats.org/drawingml/2006/main"/>
           <a:p xmlns:a="http://schemas.openxmlformats.org/drawingml/2006/main">
             <a:r>
-              <a:t>7</a:t>
+              <a:t>6</a:t>
             </a:r>
           </a:p>
         </p:txBody>

--- a/evaluation/dashboard/public/decks/uxl-onedal-maintainer-briefing.pptx
+++ b/evaluation/dashboard/public/decks/uxl-onedal-maintainer-briefing.pptx
@@ -2,19 +2,19 @@
 <file path=ppt/presentation.xml><?xml version="1.0" encoding="utf-8"?>
 <p:presentation xmlns:p="http://schemas.openxmlformats.org/presentationml/2006/main">
   <p:sldMasterIdLst>
-    <p:sldMasterId xmlns:r="http://schemas.openxmlformats.org/officeDocument/2006/relationships" id="2147483648" r:id="Ra9f967640b444692"/>
-    <p:sldMasterId xmlns:r="http://schemas.openxmlformats.org/officeDocument/2006/relationships" id="2147483665" r:id="R52e5a567c62b4d93"/>
+    <p:sldMasterId xmlns:r="http://schemas.openxmlformats.org/officeDocument/2006/relationships" id="2147483648" r:id="R6d97de5f1dab44ea"/>
+    <p:sldMasterId xmlns:r="http://schemas.openxmlformats.org/officeDocument/2006/relationships" id="2147483665" r:id="Rb6e121397d874aaf"/>
   </p:sldMasterIdLst>
   <p:notesMasterIdLst>
-    <p:notesMasterId xmlns:r="http://schemas.openxmlformats.org/officeDocument/2006/relationships" r:id="Rc62cbbea905d4cff"/>
+    <p:notesMasterId xmlns:r="http://schemas.openxmlformats.org/officeDocument/2006/relationships" r:id="R2c075262ec9a454d"/>
   </p:notesMasterIdLst>
   <p:sldIdLst>
-    <p:sldId xmlns:r="http://schemas.openxmlformats.org/officeDocument/2006/relationships" id="256" r:id="R845fc07e96004f74"/>
-    <p:sldId xmlns:r="http://schemas.openxmlformats.org/officeDocument/2006/relationships" id="257" r:id="Rf8073d41f28e4b96"/>
-    <p:sldId xmlns:r="http://schemas.openxmlformats.org/officeDocument/2006/relationships" id="258" r:id="Rd0797e6b5404478e"/>
-    <p:sldId xmlns:r="http://schemas.openxmlformats.org/officeDocument/2006/relationships" id="259" r:id="Ra497fc9d7d4a41ee"/>
-    <p:sldId xmlns:r="http://schemas.openxmlformats.org/officeDocument/2006/relationships" id="260" r:id="R28ee48a086414e0c"/>
-    <p:sldId xmlns:r="http://schemas.openxmlformats.org/officeDocument/2006/relationships" id="261" r:id="R7350bb3e27de49c3"/>
+    <p:sldId xmlns:r="http://schemas.openxmlformats.org/officeDocument/2006/relationships" id="256" r:id="R041acc7338ce4098"/>
+    <p:sldId xmlns:r="http://schemas.openxmlformats.org/officeDocument/2006/relationships" id="257" r:id="R3db1990acd44414c"/>
+    <p:sldId xmlns:r="http://schemas.openxmlformats.org/officeDocument/2006/relationships" id="258" r:id="R6145597744cd4e48"/>
+    <p:sldId xmlns:r="http://schemas.openxmlformats.org/officeDocument/2006/relationships" id="259" r:id="Rf3b197ee46994544"/>
+    <p:sldId xmlns:r="http://schemas.openxmlformats.org/officeDocument/2006/relationships" id="260" r:id="R6911a8c2630740e1"/>
+    <p:sldId xmlns:r="http://schemas.openxmlformats.org/officeDocument/2006/relationships" id="261" r:id="R1b8e1deea675492d"/>
   </p:sldIdLst>
   <p:sldSz cx="12192000" cy="6858000"/>
   <p:notesSz cx="6858000" cy="9144000"/>
@@ -503,6 +503,11 @@
           </a:p>
           <a:p xmlns:a="http://schemas.openxmlformats.org/drawingml/2006/main">
             <a:r>
+              <a:t>- https://github.com/uxlfoundation/skills/blob/main/evaluation/harbor/EVALUATOR_POLICY.md</a:t>
+            </a:r>
+          </a:p>
+          <a:p xmlns:a="http://schemas.openxmlformats.org/drawingml/2006/main">
+            <a:r>
               <a:t>[/Sources]</a:t>
             </a:r>
           </a:p>
@@ -513,7 +518,22 @@
           </a:p>
           <a:p xmlns:a="http://schemas.openxmlformats.org/drawingml/2006/main">
             <a:r>
-              <a:t>Speaker cue: oneDAL skill: preserve analytics semantics while accelerating</a:t>
+              <a:t>Presenter guidance</a:t>
+            </a:r>
+          </a:p>
+          <a:p xmlns:a="http://schemas.openxmlformats.org/drawingml/2006/main">
+            <a:r>
+              <a:t>Purpose: Introduce the draft oneDAL skill and its current evaluation coverage.</a:t>
+            </a:r>
+          </a:p>
+          <a:p xmlns:a="http://schemas.openxmlformats.org/drawingml/2006/main">
+            <a:r>
+              <a:t>Explain: The skill helps coding agents reason about native and scikit-learn-style APIs, host and distributed modes, table shape and orientation, result parity, conversion cost, and quality checks.</a:t>
+            </a:r>
+          </a:p>
+          <a:p xmlns:a="http://schemas.openxmlformats.org/drawingml/2006/main">
+            <a:r>
+              <a:t>Emphasize: This is a UXL-authored starting point awaiting project review, not approved maintainer guidance.</a:t>
             </a:r>
           </a:p>
         </p:txBody>
@@ -608,6 +628,11 @@
           </a:p>
           <a:p xmlns:a="http://schemas.openxmlformats.org/drawingml/2006/main">
             <a:r>
+              <a:t>- https://github.com/uxlfoundation/skills/blob/main/evaluation/harbor/EVALUATOR_POLICY.md</a:t>
+            </a:r>
+          </a:p>
+          <a:p xmlns:a="http://schemas.openxmlformats.org/drawingml/2006/main">
+            <a:r>
               <a:t>[/Sources]</a:t>
             </a:r>
           </a:p>
@@ -618,7 +643,22 @@
           </a:p>
           <a:p xmlns:a="http://schemas.openxmlformats.org/drawingml/2006/main">
             <a:r>
-              <a:t>Speaker cue: What the skill tells an agent today</a:t>
+              <a:t>Presenter guidance</a:t>
+            </a:r>
+          </a:p>
+          <a:p xmlns:a="http://schemas.openxmlformats.org/drawingml/2006/main">
+            <a:r>
+              <a:t>Purpose: Walk through the behavior the skill asks an agent to follow today.</a:t>
+            </a:r>
+          </a:p>
+          <a:p xmlns:a="http://schemas.openxmlformats.org/drawingml/2006/main">
+            <a:r>
+              <a:t>Explain: The intended sequence is to choose the interface and execution mode from the data and memory model, make table contracts explicit, compare outputs with a stated metric, and include conversion costs.</a:t>
+            </a:r>
+          </a:p>
+          <a:p xmlns:a="http://schemas.openxmlformats.org/drawingml/2006/main">
+            <a:r>
+              <a:t>Emphasize: A useful answer ends with reproducible evidence and a clear failure classification, not a plausible-looking command alone.</a:t>
             </a:r>
           </a:p>
         </p:txBody>
@@ -713,6 +753,11 @@
           </a:p>
           <a:p xmlns:a="http://schemas.openxmlformats.org/drawingml/2006/main">
             <a:r>
+              <a:t>- https://github.com/uxlfoundation/skills/blob/main/evaluation/harbor/EVALUATOR_POLICY.md</a:t>
+            </a:r>
+          </a:p>
+          <a:p xmlns:a="http://schemas.openxmlformats.org/drawingml/2006/main">
+            <a:r>
               <a:t>[/Sources]</a:t>
             </a:r>
           </a:p>
@@ -723,7 +768,22 @@
           </a:p>
           <a:p xmlns:a="http://schemas.openxmlformats.org/drawingml/2006/main">
             <a:r>
-              <a:t>Speaker cue: Evaluation inventory: 5 implemented, 1 honest gap</a:t>
+              <a:t>Presenter guidance</a:t>
+            </a:r>
+          </a:p>
+          <a:p xmlns:a="http://schemas.openxmlformats.org/drawingml/2006/main">
+            <a:r>
+              <a:t>Purpose: Separate evaluation inventory from evidence that the skill improves outcomes.</a:t>
+            </a:r>
+          </a:p>
+          <a:p xmlns:a="http://schemas.openxmlformats.org/drawingml/2006/main">
+            <a:r>
+              <a:t>Explain: 5 of 6 evaluation tasks are implemented; five runnable scenarios cover interface, data-contract, parity, and distributed concerns; the remaining quality-regression case needs a representative maintainer fixture.</a:t>
+            </a:r>
+          </a:p>
+          <a:p xmlns:a="http://schemas.openxmlformats.org/drawingml/2006/main">
+            <a:r>
+              <a:t>Emphasize: Implemented means the task can run. It does not mean the task passes, discriminates between treatments, or supports a promotion claim.</a:t>
             </a:r>
           </a:p>
         </p:txBody>
@@ -818,6 +878,11 @@
           </a:p>
           <a:p xmlns:a="http://schemas.openxmlformats.org/drawingml/2006/main">
             <a:r>
+              <a:t>- https://github.com/uxlfoundation/skills/blob/main/evaluation/harbor/EVALUATOR_POLICY.md</a:t>
+            </a:r>
+          </a:p>
+          <a:p xmlns:a="http://schemas.openxmlformats.org/drawingml/2006/main">
+            <a:r>
               <a:t>[/Sources]</a:t>
             </a:r>
           </a:p>
@@ -828,7 +893,22 @@
           </a:p>
           <a:p xmlns:a="http://schemas.openxmlformats.org/drawingml/2006/main">
             <a:r>
-              <a:t>Speaker cue: How we chose the content</a:t>
+              <a:t>Presenter guidance</a:t>
+            </a:r>
+          </a:p>
+          <a:p xmlns:a="http://schemas.openxmlformats.org/drawingml/2006/main">
+            <a:r>
+              <a:t>Purpose: Show how the draft guidance and task set were selected.</a:t>
+            </a:r>
+          </a:p>
+          <a:p xmlns:a="http://schemas.openxmlformats.org/drawingml/2006/main">
+            <a:r>
+              <a:t>Explain: The starting material comes from official oneDAL documentation, examples, tests, and failure boundaries around tables, distributed execution, conversion, and model-quality validation.</a:t>
+            </a:r>
+          </a:p>
+          <a:p xmlns:a="http://schemas.openxmlformats.org/drawingml/2006/main">
+            <a:r>
+              <a:t>Emphasize: Maintainers should correct, remove, or replace anything that does not reflect current project practice.</a:t>
             </a:r>
           </a:p>
         </p:txBody>
@@ -923,6 +1003,11 @@
           </a:p>
           <a:p xmlns:a="http://schemas.openxmlformats.org/drawingml/2006/main">
             <a:r>
+              <a:t>- https://github.com/uxlfoundation/skills/blob/main/evaluation/harbor/EVALUATOR_POLICY.md</a:t>
+            </a:r>
+          </a:p>
+          <a:p xmlns:a="http://schemas.openxmlformats.org/drawingml/2006/main">
+            <a:r>
               <a:t>[/Sources]</a:t>
             </a:r>
           </a:p>
@@ -933,7 +1018,22 @@
           </a:p>
           <a:p xmlns:a="http://schemas.openxmlformats.org/drawingml/2006/main">
             <a:r>
-              <a:t>Speaker cue: What project ownership would look like</a:t>
+              <a:t>Presenter guidance</a:t>
+            </a:r>
+          </a:p>
+          <a:p xmlns:a="http://schemas.openxmlformats.org/drawingml/2006/main">
+            <a:r>
+              <a:t>Purpose: Clarify the proposed ownership boundary.</a:t>
+            </a:r>
+          </a:p>
+          <a:p xmlns:a="http://schemas.openxmlformats.org/drawingml/2006/main">
+            <a:r>
+              <a:t>Explain: oneDAL maintainers own triggers, API truth, source freshness, limitations, and authentic cases; UXL maintains the catalog, Harbor integration, comparison design, and dashboard.</a:t>
+            </a:r>
+          </a:p>
+          <a:p xmlns:a="http://schemas.openxmlformats.org/drawingml/2006/main">
+            <a:r>
+              <a:t>Emphasize: The skill cannot move beyond its incubating state without named project review.</a:t>
             </a:r>
           </a:p>
         </p:txBody>
@@ -1028,6 +1128,11 @@
           </a:p>
           <a:p xmlns:a="http://schemas.openxmlformats.org/drawingml/2006/main">
             <a:r>
+              <a:t>- https://github.com/uxlfoundation/skills/blob/main/evaluation/harbor/EVALUATOR_POLICY.md</a:t>
+            </a:r>
+          </a:p>
+          <a:p xmlns:a="http://schemas.openxmlformats.org/drawingml/2006/main">
+            <a:r>
               <a:t>[/Sources]</a:t>
             </a:r>
           </a:p>
@@ -1038,7 +1143,22 @@
           </a:p>
           <a:p xmlns:a="http://schemas.openxmlformats.org/drawingml/2006/main">
             <a:r>
-              <a:t>Speaker cue: A focused 30-minute maintainer review</a:t>
+              <a:t>Presenter guidance</a:t>
+            </a:r>
+          </a:p>
+          <a:p xmlns:a="http://schemas.openxmlformats.org/drawingml/2006/main">
+            <a:r>
+              <a:t>Purpose: End with a small, concrete review request.</a:t>
+            </a:r>
+          </a:p>
+          <a:p xmlns:a="http://schemas.openxmlformats.org/drawingml/2006/main">
+            <a:r>
+              <a:t>Explain: Ask maintainers to check the trigger and technical guidance, judge the task inventory, and name a reviewer or owner.</a:t>
+            </a:r>
+          </a:p>
+          <a:p xmlns:a="http://schemas.openxmlformats.org/drawingml/2006/main">
+            <a:r>
+              <a:t>Emphasize: The desired output is specific corrections and realistic cases, not blanket endorsement of the draft.</a:t>
             </a:r>
           </a:p>
         </p:txBody>
@@ -1074,7 +1194,7 @@
     <p:bg>
       <p:bgPr>
         <a:blipFill xmlns:a="http://schemas.openxmlformats.org/drawingml/2006/main">
-          <a:blip xmlns:r="http://schemas.openxmlformats.org/officeDocument/2006/relationships" r:embed="R8f7f4918f97b4836">
+          <a:blip xmlns:r="http://schemas.openxmlformats.org/officeDocument/2006/relationships" r:embed="Rbc5111074754498f">
             <a:alphaModFix/>
           </a:blip>
           <a:stretch>
@@ -1509,7 +1629,7 @@
           <p:nvPr/>
         </p:nvPicPr>
         <p:blipFill rotWithShape="1">
-          <a:blip xmlns:r="http://schemas.openxmlformats.org/officeDocument/2006/relationships" xmlns:a="http://schemas.openxmlformats.org/drawingml/2006/main" r:embed="R3d85f13741e640f9">
+          <a:blip xmlns:r="http://schemas.openxmlformats.org/officeDocument/2006/relationships" xmlns:a="http://schemas.openxmlformats.org/drawingml/2006/main" r:embed="R759d54ec3bc44035">
             <a:alphaModFix/>
           </a:blip>
           <a:srcRect xmlns:a="http://schemas.openxmlformats.org/drawingml/2006/main" l="0" t="0" r="0" b="0"/>
@@ -1539,7 +1659,7 @@
     <p:bg>
       <p:bgPr>
         <a:blipFill xmlns:a="http://schemas.openxmlformats.org/drawingml/2006/main">
-          <a:blip xmlns:r="http://schemas.openxmlformats.org/officeDocument/2006/relationships" r:embed="R3e7492c5a12c42e0">
+          <a:blip xmlns:r="http://schemas.openxmlformats.org/officeDocument/2006/relationships" r:embed="R9032028262194765">
             <a:alphaModFix/>
           </a:blip>
           <a:stretch>
@@ -2573,7 +2693,7 @@
           <p:nvPr/>
         </p:nvPicPr>
         <p:blipFill rotWithShape="1">
-          <a:blip xmlns:r="http://schemas.openxmlformats.org/officeDocument/2006/relationships" xmlns:a="http://schemas.openxmlformats.org/drawingml/2006/main" r:embed="Ra51d071545cd497f">
+          <a:blip xmlns:r="http://schemas.openxmlformats.org/officeDocument/2006/relationships" xmlns:a="http://schemas.openxmlformats.org/drawingml/2006/main" r:embed="R4e1bd8233e664512">
             <a:alphaModFix/>
           </a:blip>
           <a:srcRect xmlns:a="http://schemas.openxmlformats.org/drawingml/2006/main" l="0" t="0" r="0" b="0"/>
@@ -3597,7 +3717,7 @@
           <p:nvPr/>
         </p:nvPicPr>
         <p:blipFill rotWithShape="1">
-          <a:blip xmlns:r="http://schemas.openxmlformats.org/officeDocument/2006/relationships" xmlns:a="http://schemas.openxmlformats.org/drawingml/2006/main" r:embed="Re546f0e919ca43fc">
+          <a:blip xmlns:r="http://schemas.openxmlformats.org/officeDocument/2006/relationships" xmlns:a="http://schemas.openxmlformats.org/drawingml/2006/main" r:embed="R0e2bd2e6b03c436f">
             <a:alphaModFix/>
           </a:blip>
           <a:srcRect xmlns:a="http://schemas.openxmlformats.org/drawingml/2006/main" l="0" t="0" r="0" b="0"/>
@@ -3627,7 +3747,7 @@
     <p:bg>
       <p:bgPr>
         <a:blipFill xmlns:a="http://schemas.openxmlformats.org/drawingml/2006/main">
-          <a:blip xmlns:r="http://schemas.openxmlformats.org/officeDocument/2006/relationships" r:embed="Re65fd5a61ab44eb1">
+          <a:blip xmlns:r="http://schemas.openxmlformats.org/officeDocument/2006/relationships" r:embed="R74eb03e40d82477e">
             <a:alphaModFix/>
           </a:blip>
           <a:stretch>
@@ -4901,7 +5021,7 @@
           <p:nvPr/>
         </p:nvPicPr>
         <p:blipFill rotWithShape="1">
-          <a:blip xmlns:r="http://schemas.openxmlformats.org/officeDocument/2006/relationships" xmlns:a="http://schemas.openxmlformats.org/drawingml/2006/main" r:embed="R62a47dc98b854815">
+          <a:blip xmlns:r="http://schemas.openxmlformats.org/officeDocument/2006/relationships" xmlns:a="http://schemas.openxmlformats.org/drawingml/2006/main" r:embed="R57e6335043e743a4">
             <a:alphaModFix/>
           </a:blip>
           <a:srcRect xmlns:a="http://schemas.openxmlformats.org/drawingml/2006/main" l="0" t="0" r="0" b="0"/>
@@ -8145,7 +8265,7 @@
           <p:nvPr/>
         </p:nvPicPr>
         <p:blipFill rotWithShape="1">
-          <a:blip xmlns:r="http://schemas.openxmlformats.org/officeDocument/2006/relationships" xmlns:a="http://schemas.openxmlformats.org/drawingml/2006/main" r:embed="Rfdb3bc6b584b491b">
+          <a:blip xmlns:r="http://schemas.openxmlformats.org/officeDocument/2006/relationships" xmlns:a="http://schemas.openxmlformats.org/drawingml/2006/main" r:embed="R7a968bbe12e94a6d">
             <a:alphaModFix/>
           </a:blip>
           <a:srcRect xmlns:a="http://schemas.openxmlformats.org/drawingml/2006/main" l="0" t="0" r="0" b="0"/>
@@ -9883,7 +10003,7 @@
           <p:nvPr/>
         </p:nvPicPr>
         <p:blipFill rotWithShape="1">
-          <a:blip xmlns:r="http://schemas.openxmlformats.org/officeDocument/2006/relationships" xmlns:a="http://schemas.openxmlformats.org/drawingml/2006/main" r:embed="Rfadc219e3d554606">
+          <a:blip xmlns:r="http://schemas.openxmlformats.org/officeDocument/2006/relationships" xmlns:a="http://schemas.openxmlformats.org/drawingml/2006/main" r:embed="R13f3f713e6de4613">
             <a:alphaModFix/>
           </a:blip>
           <a:srcRect xmlns:a="http://schemas.openxmlformats.org/drawingml/2006/main" l="0" t="0" r="0" b="0"/>
@@ -16712,7 +16832,7 @@
     <p:bg>
       <p:bgPr>
         <a:blipFill xmlns:a="http://schemas.openxmlformats.org/drawingml/2006/main">
-          <a:blip xmlns:r="http://schemas.openxmlformats.org/officeDocument/2006/relationships" r:embed="Rcb05a69f18b74444">
+          <a:blip xmlns:r="http://schemas.openxmlformats.org/officeDocument/2006/relationships" r:embed="Rcd996d9c2d6f44b2">
             <a:alphaModFix/>
           </a:blip>
           <a:stretch>
@@ -17147,7 +17267,7 @@
           <p:nvPr/>
         </p:nvPicPr>
         <p:blipFill rotWithShape="1">
-          <a:blip xmlns:r="http://schemas.openxmlformats.org/officeDocument/2006/relationships" xmlns:a="http://schemas.openxmlformats.org/drawingml/2006/main" r:embed="Re035abc6730f4e8f">
+          <a:blip xmlns:r="http://schemas.openxmlformats.org/officeDocument/2006/relationships" xmlns:a="http://schemas.openxmlformats.org/drawingml/2006/main" r:embed="R9384ad682cdd4079">
             <a:alphaModFix/>
           </a:blip>
           <a:srcRect xmlns:a="http://schemas.openxmlformats.org/drawingml/2006/main" l="0" t="0" r="0" b="0"/>
@@ -17177,7 +17297,7 @@
     <p:bg>
       <p:bgPr>
         <a:blipFill xmlns:a="http://schemas.openxmlformats.org/drawingml/2006/main">
-          <a:blip xmlns:r="http://schemas.openxmlformats.org/officeDocument/2006/relationships" r:embed="R6d1991fc51d94546">
+          <a:blip xmlns:r="http://schemas.openxmlformats.org/officeDocument/2006/relationships" r:embed="R7f1c4b49840f423b">
             <a:alphaModFix/>
           </a:blip>
           <a:stretch>
@@ -17810,7 +17930,7 @@
           <p:nvPr/>
         </p:nvPicPr>
         <p:blipFill rotWithShape="1">
-          <a:blip xmlns:r="http://schemas.openxmlformats.org/officeDocument/2006/relationships" xmlns:a="http://schemas.openxmlformats.org/drawingml/2006/main" r:embed="R3785cbfcc250415e">
+          <a:blip xmlns:r="http://schemas.openxmlformats.org/officeDocument/2006/relationships" xmlns:a="http://schemas.openxmlformats.org/drawingml/2006/main" r:embed="R8ecc04d4c01b4bb2">
             <a:alphaModFix/>
           </a:blip>
           <a:srcRect xmlns:a="http://schemas.openxmlformats.org/drawingml/2006/main" l="0" t="0" r="0" b="0"/>
@@ -18270,7 +18390,7 @@
     <p:bg>
       <p:bgPr>
         <a:blipFill xmlns:a="http://schemas.openxmlformats.org/drawingml/2006/main">
-          <a:blip xmlns:r="http://schemas.openxmlformats.org/officeDocument/2006/relationships" r:embed="R576b1bf30dc349ff">
+          <a:blip xmlns:r="http://schemas.openxmlformats.org/officeDocument/2006/relationships" r:embed="Rb957e98b43be4c71">
             <a:alphaModFix/>
           </a:blip>
           <a:stretch>
@@ -18903,7 +19023,7 @@
           <p:nvPr/>
         </p:nvPicPr>
         <p:blipFill rotWithShape="1">
-          <a:blip xmlns:r="http://schemas.openxmlformats.org/officeDocument/2006/relationships" xmlns:a="http://schemas.openxmlformats.org/drawingml/2006/main" r:embed="R113f42f85d4c4acf">
+          <a:blip xmlns:r="http://schemas.openxmlformats.org/officeDocument/2006/relationships" xmlns:a="http://schemas.openxmlformats.org/drawingml/2006/main" r:embed="R60d8ed6a5de64baf">
             <a:alphaModFix/>
           </a:blip>
           <a:srcRect xmlns:a="http://schemas.openxmlformats.org/drawingml/2006/main" l="0" t="0" r="0" b="0"/>
@@ -21559,7 +21679,7 @@
           <p:nvPr/>
         </p:nvPicPr>
         <p:blipFill rotWithShape="1">
-          <a:blip xmlns:r="http://schemas.openxmlformats.org/officeDocument/2006/relationships" xmlns:a="http://schemas.openxmlformats.org/drawingml/2006/main" r:embed="Rc60ad93884bd41af">
+          <a:blip xmlns:r="http://schemas.openxmlformats.org/officeDocument/2006/relationships" xmlns:a="http://schemas.openxmlformats.org/drawingml/2006/main" r:embed="Rbb893f26f3d142f7">
             <a:alphaModFix/>
           </a:blip>
           <a:srcRect xmlns:a="http://schemas.openxmlformats.org/drawingml/2006/main" l="0" t="0" r="0" b="0"/>
@@ -21589,7 +21709,7 @@
     <p:bg>
       <p:bgPr>
         <a:blipFill xmlns:a="http://schemas.openxmlformats.org/drawingml/2006/main">
-          <a:blip xmlns:r="http://schemas.openxmlformats.org/officeDocument/2006/relationships" r:embed="Rac2dfefb5d9c4ce4">
+          <a:blip xmlns:r="http://schemas.openxmlformats.org/officeDocument/2006/relationships" r:embed="R830f929573ad4537">
             <a:alphaModFix/>
           </a:blip>
           <a:stretch>
@@ -22433,7 +22553,7 @@
           <p:nvPr/>
         </p:nvPicPr>
         <p:blipFill rotWithShape="1">
-          <a:blip xmlns:r="http://schemas.openxmlformats.org/officeDocument/2006/relationships" xmlns:a="http://schemas.openxmlformats.org/drawingml/2006/main" r:embed="R4f83a2fdba834d16">
+          <a:blip xmlns:r="http://schemas.openxmlformats.org/officeDocument/2006/relationships" xmlns:a="http://schemas.openxmlformats.org/drawingml/2006/main" r:embed="Re245df6e139a4987">
             <a:alphaModFix/>
           </a:blip>
           <a:srcRect xmlns:a="http://schemas.openxmlformats.org/drawingml/2006/main" l="0" t="0" r="0" b="0"/>
@@ -22463,7 +22583,7 @@
     <p:bg>
       <p:bgPr>
         <a:blipFill xmlns:a="http://schemas.openxmlformats.org/drawingml/2006/main">
-          <a:blip xmlns:r="http://schemas.openxmlformats.org/officeDocument/2006/relationships" r:embed="R3771d7d60a254364">
+          <a:blip xmlns:r="http://schemas.openxmlformats.org/officeDocument/2006/relationships" r:embed="R5f680d151f464daa">
             <a:alphaModFix/>
           </a:blip>
           <a:stretch>
@@ -23411,7 +23531,7 @@
           <p:nvPr/>
         </p:nvPicPr>
         <p:blipFill rotWithShape="1">
-          <a:blip xmlns:r="http://schemas.openxmlformats.org/officeDocument/2006/relationships" xmlns:a="http://schemas.openxmlformats.org/drawingml/2006/main" r:embed="R1d0a9f02c95d4c6c">
+          <a:blip xmlns:r="http://schemas.openxmlformats.org/officeDocument/2006/relationships" xmlns:a="http://schemas.openxmlformats.org/drawingml/2006/main" r:embed="Rd383a9139ae745f9">
             <a:alphaModFix/>
           </a:blip>
           <a:srcRect xmlns:a="http://schemas.openxmlformats.org/drawingml/2006/main" l="0" t="0" r="0" b="0"/>
@@ -23441,7 +23561,7 @@
     <p:bg>
       <p:bgPr>
         <a:blipFill xmlns:a="http://schemas.openxmlformats.org/drawingml/2006/main">
-          <a:blip xmlns:r="http://schemas.openxmlformats.org/officeDocument/2006/relationships" r:embed="Re835d9bf5a204225">
+          <a:blip xmlns:r="http://schemas.openxmlformats.org/officeDocument/2006/relationships" r:embed="Rda312496dc9f4d3b">
             <a:alphaModFix/>
           </a:blip>
           <a:stretch>
@@ -23902,7 +24022,7 @@
           <p:nvPr/>
         </p:nvPicPr>
         <p:blipFill rotWithShape="1">
-          <a:blip xmlns:r="http://schemas.openxmlformats.org/officeDocument/2006/relationships" xmlns:a="http://schemas.openxmlformats.org/drawingml/2006/main" r:embed="R7f5a5d7933b7493f">
+          <a:blip xmlns:r="http://schemas.openxmlformats.org/officeDocument/2006/relationships" xmlns:a="http://schemas.openxmlformats.org/drawingml/2006/main" r:embed="R230d90016d494b3d">
             <a:alphaModFix/>
           </a:blip>
           <a:srcRect xmlns:a="http://schemas.openxmlformats.org/drawingml/2006/main" l="0" t="0" r="0" b="0"/>
@@ -25614,22 +25734,22 @@
   </p:cSld>
   <p:clrMap bg1="lt1" tx1="dk1" bg2="dk2" tx2="lt2" accent1="accent1" accent2="accent2" accent3="accent3" accent4="accent4" accent5="accent5" accent6="accent6" hlink="hlink" folHlink="folHlink"/>
   <p:sldLayoutIdLst>
-    <p:sldLayoutId xmlns:r="http://schemas.openxmlformats.org/officeDocument/2006/relationships" id="2147483649" r:id="R7dacc843c23f4871"/>
-    <p:sldLayoutId xmlns:r="http://schemas.openxmlformats.org/officeDocument/2006/relationships" id="2147483650" r:id="Rc2714e1cfc334b9f"/>
-    <p:sldLayoutId xmlns:r="http://schemas.openxmlformats.org/officeDocument/2006/relationships" id="2147483651" r:id="R93bc5f9216094be5"/>
-    <p:sldLayoutId xmlns:r="http://schemas.openxmlformats.org/officeDocument/2006/relationships" id="2147483652" r:id="R92f2ebb9f62b4d9a"/>
-    <p:sldLayoutId xmlns:r="http://schemas.openxmlformats.org/officeDocument/2006/relationships" id="2147483653" r:id="R5fde31a9885d4192"/>
-    <p:sldLayoutId xmlns:r="http://schemas.openxmlformats.org/officeDocument/2006/relationships" id="2147483654" r:id="R4ba6cad8816f4340"/>
-    <p:sldLayoutId xmlns:r="http://schemas.openxmlformats.org/officeDocument/2006/relationships" id="2147483655" r:id="R043665f919224580"/>
-    <p:sldLayoutId xmlns:r="http://schemas.openxmlformats.org/officeDocument/2006/relationships" id="2147483656" r:id="Rdbb6c93bc8e4427e"/>
-    <p:sldLayoutId xmlns:r="http://schemas.openxmlformats.org/officeDocument/2006/relationships" id="2147483657" r:id="R3d5023245f564054"/>
-    <p:sldLayoutId xmlns:r="http://schemas.openxmlformats.org/officeDocument/2006/relationships" id="2147483658" r:id="Rd265cec2b4a74202"/>
-    <p:sldLayoutId xmlns:r="http://schemas.openxmlformats.org/officeDocument/2006/relationships" id="2147483659" r:id="Rf78f4ea8dd6543f5"/>
-    <p:sldLayoutId xmlns:r="http://schemas.openxmlformats.org/officeDocument/2006/relationships" id="2147483660" r:id="R66c8275fa1e846ae"/>
-    <p:sldLayoutId xmlns:r="http://schemas.openxmlformats.org/officeDocument/2006/relationships" id="2147483661" r:id="R36a27e8e04034c89"/>
-    <p:sldLayoutId xmlns:r="http://schemas.openxmlformats.org/officeDocument/2006/relationships" id="2147483662" r:id="R2cf849d6846c4f4f"/>
-    <p:sldLayoutId xmlns:r="http://schemas.openxmlformats.org/officeDocument/2006/relationships" id="2147483663" r:id="R075e2ed4ebff4eb3"/>
-    <p:sldLayoutId xmlns:r="http://schemas.openxmlformats.org/officeDocument/2006/relationships" id="2147483664" r:id="R8c615b77190f4bc4"/>
+    <p:sldLayoutId xmlns:r="http://schemas.openxmlformats.org/officeDocument/2006/relationships" id="2147483649" r:id="R7eecbc61b88d47f6"/>
+    <p:sldLayoutId xmlns:r="http://schemas.openxmlformats.org/officeDocument/2006/relationships" id="2147483650" r:id="R1a557216863a45fb"/>
+    <p:sldLayoutId xmlns:r="http://schemas.openxmlformats.org/officeDocument/2006/relationships" id="2147483651" r:id="R84767261a3174d7b"/>
+    <p:sldLayoutId xmlns:r="http://schemas.openxmlformats.org/officeDocument/2006/relationships" id="2147483652" r:id="Rf3857c6ce7f84491"/>
+    <p:sldLayoutId xmlns:r="http://schemas.openxmlformats.org/officeDocument/2006/relationships" id="2147483653" r:id="R8798ce7760ef4097"/>
+    <p:sldLayoutId xmlns:r="http://schemas.openxmlformats.org/officeDocument/2006/relationships" id="2147483654" r:id="Rd5de11a605634db6"/>
+    <p:sldLayoutId xmlns:r="http://schemas.openxmlformats.org/officeDocument/2006/relationships" id="2147483655" r:id="Rc053db1ed1624dd5"/>
+    <p:sldLayoutId xmlns:r="http://schemas.openxmlformats.org/officeDocument/2006/relationships" id="2147483656" r:id="Rf2ef2281980e4aa4"/>
+    <p:sldLayoutId xmlns:r="http://schemas.openxmlformats.org/officeDocument/2006/relationships" id="2147483657" r:id="R388f3567b807402e"/>
+    <p:sldLayoutId xmlns:r="http://schemas.openxmlformats.org/officeDocument/2006/relationships" id="2147483658" r:id="R6783017132474283"/>
+    <p:sldLayoutId xmlns:r="http://schemas.openxmlformats.org/officeDocument/2006/relationships" id="2147483659" r:id="Rb3c4b1009ba749c5"/>
+    <p:sldLayoutId xmlns:r="http://schemas.openxmlformats.org/officeDocument/2006/relationships" id="2147483660" r:id="Rbe0229bb472b44e3"/>
+    <p:sldLayoutId xmlns:r="http://schemas.openxmlformats.org/officeDocument/2006/relationships" id="2147483661" r:id="R2a232ae8938e444b"/>
+    <p:sldLayoutId xmlns:r="http://schemas.openxmlformats.org/officeDocument/2006/relationships" id="2147483662" r:id="R6d60785304a04ccf"/>
+    <p:sldLayoutId xmlns:r="http://schemas.openxmlformats.org/officeDocument/2006/relationships" id="2147483663" r:id="Rb01b68af20504a0a"/>
+    <p:sldLayoutId xmlns:r="http://schemas.openxmlformats.org/officeDocument/2006/relationships" id="2147483664" r:id="Rbc06fe9b988246ed"/>
   </p:sldLayoutIdLst>
   <p:hf hdr="0" ftr="0" dt="0"/>
   <p:txStyles>
@@ -27822,7 +27942,7 @@
           <p:nvPr/>
         </p:nvPicPr>
         <p:blipFill rotWithShape="1">
-          <a:blip xmlns:r="http://schemas.openxmlformats.org/officeDocument/2006/relationships" xmlns:a="http://schemas.openxmlformats.org/drawingml/2006/main" r:embed="R99aa68aad0734164">
+          <a:blip xmlns:r="http://schemas.openxmlformats.org/officeDocument/2006/relationships" xmlns:a="http://schemas.openxmlformats.org/drawingml/2006/main" r:embed="R70eab2a906364ecb">
             <a:alphaModFix/>
           </a:blip>
           <a:srcRect xmlns:a="http://schemas.openxmlformats.org/drawingml/2006/main" l="0" t="0" r="0" b="0"/>
@@ -27845,19 +27965,19 @@
   </p:cSld>
   <p:clrMap bg1="lt1" tx1="dk1" bg2="dk2" tx2="lt2" accent1="accent1" accent2="accent2" accent3="accent3" accent4="accent4" accent5="accent5" accent6="accent6" hlink="hlink" folHlink="folHlink"/>
   <p:sldLayoutIdLst>
-    <p:sldLayoutId xmlns:r="http://schemas.openxmlformats.org/officeDocument/2006/relationships" id="2147483666" r:id="R86a2d9bd73cc4b7b"/>
-    <p:sldLayoutId xmlns:r="http://schemas.openxmlformats.org/officeDocument/2006/relationships" id="2147483667" r:id="R3bcacb1afcd4402e"/>
-    <p:sldLayoutId xmlns:r="http://schemas.openxmlformats.org/officeDocument/2006/relationships" id="2147483668" r:id="R17ec190a67034525"/>
-    <p:sldLayoutId xmlns:r="http://schemas.openxmlformats.org/officeDocument/2006/relationships" id="2147483669" r:id="Rddf29c9efdc04f08"/>
-    <p:sldLayoutId xmlns:r="http://schemas.openxmlformats.org/officeDocument/2006/relationships" id="2147483670" r:id="R82c09cce37fb46bd"/>
-    <p:sldLayoutId xmlns:r="http://schemas.openxmlformats.org/officeDocument/2006/relationships" id="2147483671" r:id="R4f41b6bbd5bc443d"/>
-    <p:sldLayoutId xmlns:r="http://schemas.openxmlformats.org/officeDocument/2006/relationships" id="2147483672" r:id="R41192d4b62dc4173"/>
-    <p:sldLayoutId xmlns:r="http://schemas.openxmlformats.org/officeDocument/2006/relationships" id="2147483673" r:id="Re81a19e15d104246"/>
-    <p:sldLayoutId xmlns:r="http://schemas.openxmlformats.org/officeDocument/2006/relationships" id="2147483674" r:id="R66b9d2da6a114b62"/>
-    <p:sldLayoutId xmlns:r="http://schemas.openxmlformats.org/officeDocument/2006/relationships" id="2147483675" r:id="R82844b48d5904575"/>
-    <p:sldLayoutId xmlns:r="http://schemas.openxmlformats.org/officeDocument/2006/relationships" id="2147483676" r:id="R87fbd78e114a4a15"/>
-    <p:sldLayoutId xmlns:r="http://schemas.openxmlformats.org/officeDocument/2006/relationships" id="2147483677" r:id="Rf4b885f9c8cc49c4"/>
-    <p:sldLayoutId xmlns:r="http://schemas.openxmlformats.org/officeDocument/2006/relationships" id="2147483678" r:id="R3f397c56f81b46be"/>
+    <p:sldLayoutId xmlns:r="http://schemas.openxmlformats.org/officeDocument/2006/relationships" id="2147483666" r:id="R98314363854241f3"/>
+    <p:sldLayoutId xmlns:r="http://schemas.openxmlformats.org/officeDocument/2006/relationships" id="2147483667" r:id="R9bdb6e56bda14d8a"/>
+    <p:sldLayoutId xmlns:r="http://schemas.openxmlformats.org/officeDocument/2006/relationships" id="2147483668" r:id="R4bdb0a0084014167"/>
+    <p:sldLayoutId xmlns:r="http://schemas.openxmlformats.org/officeDocument/2006/relationships" id="2147483669" r:id="R92425e3c9de24853"/>
+    <p:sldLayoutId xmlns:r="http://schemas.openxmlformats.org/officeDocument/2006/relationships" id="2147483670" r:id="R63a88a4601424cfd"/>
+    <p:sldLayoutId xmlns:r="http://schemas.openxmlformats.org/officeDocument/2006/relationships" id="2147483671" r:id="R4c07ad10aab54fd0"/>
+    <p:sldLayoutId xmlns:r="http://schemas.openxmlformats.org/officeDocument/2006/relationships" id="2147483672" r:id="R1e5b42a9c3574d02"/>
+    <p:sldLayoutId xmlns:r="http://schemas.openxmlformats.org/officeDocument/2006/relationships" id="2147483673" r:id="R0d9988d9604f4a12"/>
+    <p:sldLayoutId xmlns:r="http://schemas.openxmlformats.org/officeDocument/2006/relationships" id="2147483674" r:id="R9122503817074b4f"/>
+    <p:sldLayoutId xmlns:r="http://schemas.openxmlformats.org/officeDocument/2006/relationships" id="2147483675" r:id="R7c7b2de3dff24f04"/>
+    <p:sldLayoutId xmlns:r="http://schemas.openxmlformats.org/officeDocument/2006/relationships" id="2147483676" r:id="R87cfd88c41b94852"/>
+    <p:sldLayoutId xmlns:r="http://schemas.openxmlformats.org/officeDocument/2006/relationships" id="2147483677" r:id="R91c5afdd9806463b"/>
+    <p:sldLayoutId xmlns:r="http://schemas.openxmlformats.org/officeDocument/2006/relationships" id="2147483678" r:id="Rca60bbd2770842e3"/>
   </p:sldLayoutIdLst>
   <p:hf hdr="0" ftr="0" dt="0"/>
   <p:txStyles>
